--- a/hw01.pptx
+++ b/hw01.pptx
@@ -5,7 +5,14 @@
     <p:sldMasterId id="2147483648" r:id="rId1"/>
   </p:sldMasterIdLst>
   <p:sldIdLst>
-    <p:sldId id="256" r:id="rId2"/>
+    <p:sldId id="262" r:id="rId2"/>
+    <p:sldId id="256" r:id="rId3"/>
+    <p:sldId id="259" r:id="rId4"/>
+    <p:sldId id="257" r:id="rId5"/>
+    <p:sldId id="258" r:id="rId6"/>
+    <p:sldId id="260" r:id="rId7"/>
+    <p:sldId id="263" r:id="rId8"/>
+    <p:sldId id="261" r:id="rId9"/>
   </p:sldIdLst>
   <p:sldSz cx="12192000" cy="6858000"/>
   <p:notesSz cx="6858000" cy="9144000"/>
@@ -104,6 +111,11 @@
       </a:defRPr>
     </a:lvl9pPr>
   </p:defaultTextStyle>
+  <p:extLst>
+    <p:ext uri="{EFAFB233-063F-42B5-8137-9DF3F51BA10A}">
+      <p15:sldGuideLst xmlns:p15="http://schemas.microsoft.com/office/powerpoint/2012/main"/>
+    </p:ext>
+  </p:extLst>
 </p:presentation>
 </file>
 
@@ -254,7 +266,7 @@
           <a:p>
             <a:fld id="{C3C90D7E-32D6-4894-AE08-7BBB3E610FC9}" type="datetimeFigureOut">
               <a:rPr lang="zh-TW" altLang="en-US" smtClean="0"/>
-              <a:t>2024/9/16</a:t>
+              <a:t>2024/10/20</a:t>
             </a:fld>
             <a:endParaRPr lang="zh-TW" altLang="en-US"/>
           </a:p>
@@ -452,7 +464,7 @@
           <a:p>
             <a:fld id="{C3C90D7E-32D6-4894-AE08-7BBB3E610FC9}" type="datetimeFigureOut">
               <a:rPr lang="zh-TW" altLang="en-US" smtClean="0"/>
-              <a:t>2024/9/16</a:t>
+              <a:t>2024/10/20</a:t>
             </a:fld>
             <a:endParaRPr lang="zh-TW" altLang="en-US"/>
           </a:p>
@@ -660,7 +672,7 @@
           <a:p>
             <a:fld id="{C3C90D7E-32D6-4894-AE08-7BBB3E610FC9}" type="datetimeFigureOut">
               <a:rPr lang="zh-TW" altLang="en-US" smtClean="0"/>
-              <a:t>2024/9/16</a:t>
+              <a:t>2024/10/20</a:t>
             </a:fld>
             <a:endParaRPr lang="zh-TW" altLang="en-US"/>
           </a:p>
@@ -858,7 +870,7 @@
           <a:p>
             <a:fld id="{C3C90D7E-32D6-4894-AE08-7BBB3E610FC9}" type="datetimeFigureOut">
               <a:rPr lang="zh-TW" altLang="en-US" smtClean="0"/>
-              <a:t>2024/9/16</a:t>
+              <a:t>2024/10/20</a:t>
             </a:fld>
             <a:endParaRPr lang="zh-TW" altLang="en-US"/>
           </a:p>
@@ -1133,7 +1145,7 @@
           <a:p>
             <a:fld id="{C3C90D7E-32D6-4894-AE08-7BBB3E610FC9}" type="datetimeFigureOut">
               <a:rPr lang="zh-TW" altLang="en-US" smtClean="0"/>
-              <a:t>2024/9/16</a:t>
+              <a:t>2024/10/20</a:t>
             </a:fld>
             <a:endParaRPr lang="zh-TW" altLang="en-US"/>
           </a:p>
@@ -1398,7 +1410,7 @@
           <a:p>
             <a:fld id="{C3C90D7E-32D6-4894-AE08-7BBB3E610FC9}" type="datetimeFigureOut">
               <a:rPr lang="zh-TW" altLang="en-US" smtClean="0"/>
-              <a:t>2024/9/16</a:t>
+              <a:t>2024/10/20</a:t>
             </a:fld>
             <a:endParaRPr lang="zh-TW" altLang="en-US"/>
           </a:p>
@@ -1810,7 +1822,7 @@
           <a:p>
             <a:fld id="{C3C90D7E-32D6-4894-AE08-7BBB3E610FC9}" type="datetimeFigureOut">
               <a:rPr lang="zh-TW" altLang="en-US" smtClean="0"/>
-              <a:t>2024/9/16</a:t>
+              <a:t>2024/10/20</a:t>
             </a:fld>
             <a:endParaRPr lang="zh-TW" altLang="en-US"/>
           </a:p>
@@ -1951,7 +1963,7 @@
           <a:p>
             <a:fld id="{C3C90D7E-32D6-4894-AE08-7BBB3E610FC9}" type="datetimeFigureOut">
               <a:rPr lang="zh-TW" altLang="en-US" smtClean="0"/>
-              <a:t>2024/9/16</a:t>
+              <a:t>2024/10/20</a:t>
             </a:fld>
             <a:endParaRPr lang="zh-TW" altLang="en-US"/>
           </a:p>
@@ -2064,7 +2076,7 @@
           <a:p>
             <a:fld id="{C3C90D7E-32D6-4894-AE08-7BBB3E610FC9}" type="datetimeFigureOut">
               <a:rPr lang="zh-TW" altLang="en-US" smtClean="0"/>
-              <a:t>2024/9/16</a:t>
+              <a:t>2024/10/20</a:t>
             </a:fld>
             <a:endParaRPr lang="zh-TW" altLang="en-US"/>
           </a:p>
@@ -2375,7 +2387,7 @@
           <a:p>
             <a:fld id="{C3C90D7E-32D6-4894-AE08-7BBB3E610FC9}" type="datetimeFigureOut">
               <a:rPr lang="zh-TW" altLang="en-US" smtClean="0"/>
-              <a:t>2024/9/16</a:t>
+              <a:t>2024/10/20</a:t>
             </a:fld>
             <a:endParaRPr lang="zh-TW" altLang="en-US"/>
           </a:p>
@@ -2663,7 +2675,7 @@
           <a:p>
             <a:fld id="{C3C90D7E-32D6-4894-AE08-7BBB3E610FC9}" type="datetimeFigureOut">
               <a:rPr lang="zh-TW" altLang="en-US" smtClean="0"/>
-              <a:t>2024/9/16</a:t>
+              <a:t>2024/10/20</a:t>
             </a:fld>
             <a:endParaRPr lang="zh-TW" altLang="en-US"/>
           </a:p>
@@ -2904,7 +2916,7 @@
           <a:p>
             <a:fld id="{C3C90D7E-32D6-4894-AE08-7BBB3E610FC9}" type="datetimeFigureOut">
               <a:rPr lang="zh-TW" altLang="en-US" smtClean="0"/>
-              <a:t>2024/9/16</a:t>
+              <a:t>2024/10/20</a:t>
             </a:fld>
             <a:endParaRPr lang="zh-TW" altLang="en-US"/>
           </a:p>
@@ -3321,53 +3333,262 @@
           <a:chExt cx="0" cy="0"/>
         </a:xfrm>
       </p:grpSpPr>
-      <p:sp>
-        <p:nvSpPr>
-          <p:cNvPr id="2" name="標題 1">
-            <a:extLst>
-              <a:ext uri="{FF2B5EF4-FFF2-40B4-BE49-F238E27FC236}">
-                <a16:creationId xmlns:a16="http://schemas.microsoft.com/office/drawing/2014/main" id="{32532283-9F93-4E44-8138-32796965361F}"/>
-              </a:ext>
-            </a:extLst>
-          </p:cNvPr>
-          <p:cNvSpPr>
-            <a:spLocks noGrp="1"/>
-          </p:cNvSpPr>
-          <p:nvPr>
-            <p:ph type="ctrTitle"/>
-          </p:nvPr>
-        </p:nvSpPr>
-        <p:spPr/>
-        <p:txBody>
-          <a:bodyPr/>
-          <a:lstStyle/>
-          <a:p>
-            <a:endParaRPr lang="zh-TW" altLang="en-US"/>
-          </a:p>
-        </p:txBody>
-      </p:sp>
-      <p:sp>
-        <p:nvSpPr>
-          <p:cNvPr id="3" name="副標題 2">
-            <a:extLst>
-              <a:ext uri="{FF2B5EF4-FFF2-40B4-BE49-F238E27FC236}">
-                <a16:creationId xmlns:a16="http://schemas.microsoft.com/office/drawing/2014/main" id="{8C946F38-524D-4B98-B9CB-80AEE57E455A}"/>
-              </a:ext>
-            </a:extLst>
-          </p:cNvPr>
-          <p:cNvSpPr>
-            <a:spLocks noGrp="1"/>
-          </p:cNvSpPr>
-          <p:nvPr>
-            <p:ph type="subTitle" idx="1"/>
-          </p:nvPr>
-        </p:nvSpPr>
-        <p:spPr/>
-        <p:txBody>
-          <a:bodyPr/>
-          <a:lstStyle/>
-          <a:p>
-            <a:endParaRPr lang="zh-TW" altLang="en-US"/>
+      <p:pic>
+        <p:nvPicPr>
+          <p:cNvPr id="6" name="圖片 5">
+            <a:extLst>
+              <a:ext uri="{FF2B5EF4-FFF2-40B4-BE49-F238E27FC236}">
+                <a16:creationId xmlns:a16="http://schemas.microsoft.com/office/drawing/2014/main" id="{D56FBA74-1197-5D02-6CA3-6D82D7AA8B18}"/>
+              </a:ext>
+            </a:extLst>
+          </p:cNvPr>
+          <p:cNvPicPr>
+            <a:picLocks noChangeAspect="1"/>
+          </p:cNvPicPr>
+          <p:nvPr/>
+        </p:nvPicPr>
+        <p:blipFill>
+          <a:blip r:embed="rId2"/>
+          <a:srcRect l="890" t="1941" b="1941"/>
+          <a:stretch/>
+        </p:blipFill>
+        <p:spPr>
+          <a:xfrm>
+            <a:off x="-182880" y="0"/>
+            <a:ext cx="12374880" cy="6858000"/>
+          </a:xfrm>
+          <a:prstGeom prst="rect">
+            <a:avLst/>
+          </a:prstGeom>
+        </p:spPr>
+      </p:pic>
+      <p:sp>
+        <p:nvSpPr>
+          <p:cNvPr id="2" name="文字方塊 1">
+            <a:extLst>
+              <a:ext uri="{FF2B5EF4-FFF2-40B4-BE49-F238E27FC236}">
+                <a16:creationId xmlns:a16="http://schemas.microsoft.com/office/drawing/2014/main" id="{2A2B1D35-BC08-631B-3E5E-25C657A11823}"/>
+              </a:ext>
+            </a:extLst>
+          </p:cNvPr>
+          <p:cNvSpPr txBox="1"/>
+          <p:nvPr/>
+        </p:nvSpPr>
+        <p:spPr>
+          <a:xfrm>
+            <a:off x="3067396" y="1982450"/>
+            <a:ext cx="5860473" cy="1446550"/>
+          </a:xfrm>
+          <a:prstGeom prst="rect">
+            <a:avLst/>
+          </a:prstGeom>
+          <a:noFill/>
+        </p:spPr>
+        <p:txBody>
+          <a:bodyPr wrap="square" rtlCol="0">
+            <a:spAutoFit/>
+          </a:bodyPr>
+          <a:lstStyle/>
+          <a:p>
+            <a:pPr algn="ctr"/>
+            <a:r>
+              <a:rPr lang="zh-TW" altLang="en-US" sz="4400" dirty="0">
+                <a:latin typeface="源泉圓體 H" panose="020B0A00000000000000" pitchFamily="34" charset="-120"/>
+                <a:ea typeface="源泉圓體 H" panose="020B0A00000000000000" pitchFamily="34" charset="-120"/>
+              </a:rPr>
+              <a:t>自我介紹</a:t>
+            </a:r>
+            <a:endParaRPr lang="en-US" altLang="zh-TW" sz="4400" dirty="0">
+              <a:latin typeface="源泉圓體 H" panose="020B0A00000000000000" pitchFamily="34" charset="-120"/>
+              <a:ea typeface="源泉圓體 H" panose="020B0A00000000000000" pitchFamily="34" charset="-120"/>
+            </a:endParaRPr>
+          </a:p>
+          <a:p>
+            <a:pPr algn="ctr"/>
+            <a:r>
+              <a:rPr lang="en-US" altLang="zh-TW" sz="4400" dirty="0">
+                <a:latin typeface="源泉圓體 H" panose="020B0A00000000000000" pitchFamily="34" charset="-120"/>
+                <a:ea typeface="源泉圓體 H" panose="020B0A00000000000000" pitchFamily="34" charset="-120"/>
+              </a:rPr>
+              <a:t>(NIZIMA LIVE)</a:t>
+            </a:r>
+            <a:endParaRPr lang="zh-TW" altLang="en-US" sz="4400" dirty="0">
+              <a:latin typeface="源泉圓體 H" panose="020B0A00000000000000" pitchFamily="34" charset="-120"/>
+              <a:ea typeface="源泉圓體 H" panose="020B0A00000000000000" pitchFamily="34" charset="-120"/>
+            </a:endParaRPr>
+          </a:p>
+        </p:txBody>
+      </p:sp>
+    </p:spTree>
+    <p:extLst>
+      <p:ext uri="{BB962C8B-B14F-4D97-AF65-F5344CB8AC3E}">
+        <p14:creationId xmlns:p14="http://schemas.microsoft.com/office/powerpoint/2010/main" val="509589534"/>
+      </p:ext>
+    </p:extLst>
+  </p:cSld>
+  <p:clrMapOvr>
+    <a:masterClrMapping/>
+  </p:clrMapOvr>
+  <mc:AlternateContent xmlns:mc="http://schemas.openxmlformats.org/markup-compatibility/2006">
+    <mc:Choice xmlns:p159="http://schemas.microsoft.com/office/powerpoint/2015/09/main" Requires="p159">
+      <p:transition xmlns:p14="http://schemas.microsoft.com/office/powerpoint/2010/main" spd="slow" p14:dur="2000">
+        <p159:morph option="byObject"/>
+      </p:transition>
+    </mc:Choice>
+    <mc:Fallback>
+      <p:transition spd="slow">
+        <p:fade/>
+      </p:transition>
+    </mc:Fallback>
+  </mc:AlternateContent>
+</p:sld>
+</file>
+
+<file path=ppt/slides/slide2.xml><?xml version="1.0" encoding="utf-8"?>
+<p:sld xmlns:a="http://schemas.openxmlformats.org/drawingml/2006/main" xmlns:r="http://schemas.openxmlformats.org/officeDocument/2006/relationships" xmlns:p="http://schemas.openxmlformats.org/presentationml/2006/main">
+  <p:cSld>
+    <p:spTree>
+      <p:nvGrpSpPr>
+        <p:cNvPr id="1" name=""/>
+        <p:cNvGrpSpPr/>
+        <p:nvPr/>
+      </p:nvGrpSpPr>
+      <p:grpSpPr>
+        <a:xfrm>
+          <a:off x="0" y="0"/>
+          <a:ext cx="0" cy="0"/>
+          <a:chOff x="0" y="0"/>
+          <a:chExt cx="0" cy="0"/>
+        </a:xfrm>
+      </p:grpSpPr>
+      <p:pic>
+        <p:nvPicPr>
+          <p:cNvPr id="6" name="圖片 5">
+            <a:extLst>
+              <a:ext uri="{FF2B5EF4-FFF2-40B4-BE49-F238E27FC236}">
+                <a16:creationId xmlns:a16="http://schemas.microsoft.com/office/drawing/2014/main" id="{D56FBA74-1197-5D02-6CA3-6D82D7AA8B18}"/>
+              </a:ext>
+            </a:extLst>
+          </p:cNvPr>
+          <p:cNvPicPr>
+            <a:picLocks noChangeAspect="1"/>
+          </p:cNvPicPr>
+          <p:nvPr/>
+        </p:nvPicPr>
+        <p:blipFill>
+          <a:blip r:embed="rId2"/>
+          <a:srcRect l="890" t="1941" b="1941"/>
+          <a:stretch/>
+        </p:blipFill>
+        <p:spPr>
+          <a:xfrm>
+            <a:off x="-182880" y="0"/>
+            <a:ext cx="12374880" cy="6858000"/>
+          </a:xfrm>
+          <a:prstGeom prst="rect">
+            <a:avLst/>
+          </a:prstGeom>
+        </p:spPr>
+      </p:pic>
+      <p:pic>
+        <p:nvPicPr>
+          <p:cNvPr id="20" name="圖片 19">
+            <a:extLst>
+              <a:ext uri="{FF2B5EF4-FFF2-40B4-BE49-F238E27FC236}">
+                <a16:creationId xmlns:a16="http://schemas.microsoft.com/office/drawing/2014/main" id="{76BD00FC-8840-EE73-B084-3B9FAAD75C57}"/>
+              </a:ext>
+            </a:extLst>
+          </p:cNvPr>
+          <p:cNvPicPr>
+            <a:picLocks noChangeAspect="1"/>
+          </p:cNvPicPr>
+          <p:nvPr/>
+        </p:nvPicPr>
+        <p:blipFill>
+          <a:blip r:embed="rId3" cstate="print">
+            <a:extLst>
+              <a:ext uri="{28A0092B-C50C-407E-A947-70E740481C1C}">
+                <a14:useLocalDpi xmlns:a14="http://schemas.microsoft.com/office/drawing/2010/main" val="0"/>
+              </a:ext>
+            </a:extLst>
+          </a:blip>
+          <a:srcRect/>
+          <a:stretch>
+            <a:fillRect/>
+          </a:stretch>
+        </p:blipFill>
+        <p:spPr bwMode="auto">
+          <a:xfrm>
+            <a:off x="2286731" y="589934"/>
+            <a:ext cx="7413041" cy="4234958"/>
+          </a:xfrm>
+          <a:prstGeom prst="rect">
+            <a:avLst/>
+          </a:prstGeom>
+          <a:noFill/>
+          <a:scene3d>
+            <a:camera prst="orthographicFront"/>
+            <a:lightRig rig="threePt" dir="t"/>
+          </a:scene3d>
+          <a:sp3d>
+            <a:bevelT/>
+          </a:sp3d>
+        </p:spPr>
+      </p:pic>
+      <p:sp>
+        <p:nvSpPr>
+          <p:cNvPr id="14" name="文字方塊 13">
+            <a:extLst>
+              <a:ext uri="{FF2B5EF4-FFF2-40B4-BE49-F238E27FC236}">
+                <a16:creationId xmlns:a16="http://schemas.microsoft.com/office/drawing/2014/main" id="{8CF04B4C-231B-D410-0D1B-1ACDDE050485}"/>
+              </a:ext>
+            </a:extLst>
+          </p:cNvPr>
+          <p:cNvSpPr txBox="1"/>
+          <p:nvPr/>
+        </p:nvSpPr>
+        <p:spPr>
+          <a:xfrm>
+            <a:off x="4765271" y="4888750"/>
+            <a:ext cx="2478578" cy="769441"/>
+          </a:xfrm>
+          <a:prstGeom prst="rect">
+            <a:avLst/>
+          </a:prstGeom>
+          <a:noFill/>
+        </p:spPr>
+        <p:txBody>
+          <a:bodyPr wrap="square" rtlCol="0">
+            <a:spAutoFit/>
+          </a:bodyPr>
+          <a:lstStyle/>
+          <a:p>
+            <a:pPr algn="ctr"/>
+            <a:r>
+              <a:rPr lang="zh-TW" altLang="en-US" sz="4400" dirty="0">
+                <a:ln w="19050">
+                  <a:solidFill>
+                    <a:schemeClr val="accent1">
+                      <a:lumMod val="75000"/>
+                    </a:schemeClr>
+                  </a:solidFill>
+                </a:ln>
+                <a:solidFill>
+                  <a:schemeClr val="bg1"/>
+                </a:solidFill>
+                <a:effectLst>
+                  <a:glow rad="63500">
+                    <a:schemeClr val="accent1">
+                      <a:satMod val="175000"/>
+                      <a:alpha val="40000"/>
+                    </a:schemeClr>
+                  </a:glow>
+                </a:effectLst>
+                <a:latin typeface="源泉圓體 H" panose="020B0A00000000000000" pitchFamily="34" charset="-120"/>
+                <a:ea typeface="源泉圓體 H" panose="020B0A00000000000000" pitchFamily="34" charset="-120"/>
+              </a:rPr>
+              <a:t>目　標</a:t>
+            </a:r>
           </a:p>
         </p:txBody>
       </p:sp>
@@ -3381,6 +3602,1056 @@
   <p:clrMapOvr>
     <a:masterClrMapping/>
   </p:clrMapOvr>
+  <mc:AlternateContent xmlns:mc="http://schemas.openxmlformats.org/markup-compatibility/2006">
+    <mc:Choice xmlns:p159="http://schemas.microsoft.com/office/powerpoint/2015/09/main" Requires="p159">
+      <p:transition xmlns:p14="http://schemas.microsoft.com/office/powerpoint/2010/main" spd="slow" p14:dur="2000">
+        <p159:morph option="byObject"/>
+      </p:transition>
+    </mc:Choice>
+    <mc:Fallback>
+      <p:transition spd="slow">
+        <p:fade/>
+      </p:transition>
+    </mc:Fallback>
+  </mc:AlternateContent>
+</p:sld>
+</file>
+
+<file path=ppt/slides/slide3.xml><?xml version="1.0" encoding="utf-8"?>
+<p:sld xmlns:a="http://schemas.openxmlformats.org/drawingml/2006/main" xmlns:r="http://schemas.openxmlformats.org/officeDocument/2006/relationships" xmlns:p="http://schemas.openxmlformats.org/presentationml/2006/main">
+  <p:cSld>
+    <p:spTree>
+      <p:nvGrpSpPr>
+        <p:cNvPr id="1" name=""/>
+        <p:cNvGrpSpPr/>
+        <p:nvPr/>
+      </p:nvGrpSpPr>
+      <p:grpSpPr>
+        <a:xfrm>
+          <a:off x="0" y="0"/>
+          <a:ext cx="0" cy="0"/>
+          <a:chOff x="0" y="0"/>
+          <a:chExt cx="0" cy="0"/>
+        </a:xfrm>
+      </p:grpSpPr>
+      <p:pic>
+        <p:nvPicPr>
+          <p:cNvPr id="6" name="圖片 5">
+            <a:extLst>
+              <a:ext uri="{FF2B5EF4-FFF2-40B4-BE49-F238E27FC236}">
+                <a16:creationId xmlns:a16="http://schemas.microsoft.com/office/drawing/2014/main" id="{D56FBA74-1197-5D02-6CA3-6D82D7AA8B18}"/>
+              </a:ext>
+            </a:extLst>
+          </p:cNvPr>
+          <p:cNvPicPr>
+            <a:picLocks noChangeAspect="1"/>
+          </p:cNvPicPr>
+          <p:nvPr/>
+        </p:nvPicPr>
+        <p:blipFill>
+          <a:blip r:embed="rId2"/>
+          <a:srcRect l="890" t="1941" b="1941"/>
+          <a:stretch/>
+        </p:blipFill>
+        <p:spPr>
+          <a:xfrm>
+            <a:off x="-182880" y="0"/>
+            <a:ext cx="12374880" cy="6858000"/>
+          </a:xfrm>
+          <a:prstGeom prst="rect">
+            <a:avLst/>
+          </a:prstGeom>
+        </p:spPr>
+      </p:pic>
+      <p:pic>
+        <p:nvPicPr>
+          <p:cNvPr id="3" name="圖片 2">
+            <a:extLst>
+              <a:ext uri="{FF2B5EF4-FFF2-40B4-BE49-F238E27FC236}">
+                <a16:creationId xmlns:a16="http://schemas.microsoft.com/office/drawing/2014/main" id="{AD6C045A-259B-43F5-41F2-7794B500E73C}"/>
+              </a:ext>
+            </a:extLst>
+          </p:cNvPr>
+          <p:cNvPicPr>
+            <a:picLocks noChangeAspect="1"/>
+          </p:cNvPicPr>
+          <p:nvPr/>
+        </p:nvPicPr>
+        <p:blipFill>
+          <a:blip r:embed="rId3" cstate="print">
+            <a:extLst>
+              <a:ext uri="{28A0092B-C50C-407E-A947-70E740481C1C}">
+                <a14:useLocalDpi xmlns:a14="http://schemas.microsoft.com/office/drawing/2010/main" val="0"/>
+              </a:ext>
+            </a:extLst>
+          </a:blip>
+          <a:srcRect/>
+          <a:stretch>
+            <a:fillRect/>
+          </a:stretch>
+        </p:blipFill>
+        <p:spPr bwMode="auto">
+          <a:xfrm>
+            <a:off x="2286731" y="582668"/>
+            <a:ext cx="7406976" cy="4232824"/>
+          </a:xfrm>
+          <a:prstGeom prst="rect">
+            <a:avLst/>
+          </a:prstGeom>
+          <a:noFill/>
+          <a:scene3d>
+            <a:camera prst="orthographicFront"/>
+            <a:lightRig rig="threePt" dir="t"/>
+          </a:scene3d>
+          <a:sp3d>
+            <a:bevelT/>
+          </a:sp3d>
+        </p:spPr>
+      </p:pic>
+      <p:sp>
+        <p:nvSpPr>
+          <p:cNvPr id="4" name="文字方塊 3">
+            <a:extLst>
+              <a:ext uri="{FF2B5EF4-FFF2-40B4-BE49-F238E27FC236}">
+                <a16:creationId xmlns:a16="http://schemas.microsoft.com/office/drawing/2014/main" id="{75087EDA-1516-840D-15EC-95091B9ED09D}"/>
+              </a:ext>
+            </a:extLst>
+          </p:cNvPr>
+          <p:cNvSpPr txBox="1"/>
+          <p:nvPr/>
+        </p:nvSpPr>
+        <p:spPr>
+          <a:xfrm>
+            <a:off x="4765271" y="4888750"/>
+            <a:ext cx="2478578" cy="769441"/>
+          </a:xfrm>
+          <a:prstGeom prst="rect">
+            <a:avLst/>
+          </a:prstGeom>
+          <a:noFill/>
+        </p:spPr>
+        <p:txBody>
+          <a:bodyPr wrap="square" rtlCol="0">
+            <a:spAutoFit/>
+          </a:bodyPr>
+          <a:lstStyle/>
+          <a:p>
+            <a:pPr algn="ctr"/>
+            <a:r>
+              <a:rPr lang="zh-TW" altLang="en-US" sz="4400" dirty="0">
+                <a:ln w="19050">
+                  <a:solidFill>
+                    <a:schemeClr val="accent1">
+                      <a:lumMod val="75000"/>
+                    </a:schemeClr>
+                  </a:solidFill>
+                </a:ln>
+                <a:solidFill>
+                  <a:schemeClr val="bg1"/>
+                </a:solidFill>
+                <a:effectLst>
+                  <a:glow rad="63500">
+                    <a:schemeClr val="accent1">
+                      <a:satMod val="175000"/>
+                      <a:alpha val="40000"/>
+                    </a:schemeClr>
+                  </a:glow>
+                </a:effectLst>
+                <a:latin typeface="源泉圓體 H" panose="020B0A00000000000000" pitchFamily="34" charset="-120"/>
+                <a:ea typeface="源泉圓體 H" panose="020B0A00000000000000" pitchFamily="34" charset="-120"/>
+              </a:rPr>
+              <a:t>阻　礙</a:t>
+            </a:r>
+          </a:p>
+        </p:txBody>
+      </p:sp>
+    </p:spTree>
+    <p:extLst>
+      <p:ext uri="{BB962C8B-B14F-4D97-AF65-F5344CB8AC3E}">
+        <p14:creationId xmlns:p14="http://schemas.microsoft.com/office/powerpoint/2010/main" val="1479581747"/>
+      </p:ext>
+    </p:extLst>
+  </p:cSld>
+  <p:clrMapOvr>
+    <a:masterClrMapping/>
+  </p:clrMapOvr>
+  <mc:AlternateContent xmlns:mc="http://schemas.openxmlformats.org/markup-compatibility/2006">
+    <mc:Choice xmlns:p159="http://schemas.microsoft.com/office/powerpoint/2015/09/main" Requires="p159">
+      <p:transition xmlns:p14="http://schemas.microsoft.com/office/powerpoint/2010/main" spd="slow" p14:dur="2000">
+        <p159:morph option="byObject"/>
+      </p:transition>
+    </mc:Choice>
+    <mc:Fallback>
+      <p:transition spd="slow">
+        <p:fade/>
+      </p:transition>
+    </mc:Fallback>
+  </mc:AlternateContent>
+</p:sld>
+</file>
+
+<file path=ppt/slides/slide4.xml><?xml version="1.0" encoding="utf-8"?>
+<p:sld xmlns:a="http://schemas.openxmlformats.org/drawingml/2006/main" xmlns:r="http://schemas.openxmlformats.org/officeDocument/2006/relationships" xmlns:p="http://schemas.openxmlformats.org/presentationml/2006/main">
+  <p:cSld>
+    <p:spTree>
+      <p:nvGrpSpPr>
+        <p:cNvPr id="1" name=""/>
+        <p:cNvGrpSpPr/>
+        <p:nvPr/>
+      </p:nvGrpSpPr>
+      <p:grpSpPr>
+        <a:xfrm>
+          <a:off x="0" y="0"/>
+          <a:ext cx="0" cy="0"/>
+          <a:chOff x="0" y="0"/>
+          <a:chExt cx="0" cy="0"/>
+        </a:xfrm>
+      </p:grpSpPr>
+      <p:pic>
+        <p:nvPicPr>
+          <p:cNvPr id="6" name="圖片 5">
+            <a:extLst>
+              <a:ext uri="{FF2B5EF4-FFF2-40B4-BE49-F238E27FC236}">
+                <a16:creationId xmlns:a16="http://schemas.microsoft.com/office/drawing/2014/main" id="{D56FBA74-1197-5D02-6CA3-6D82D7AA8B18}"/>
+              </a:ext>
+            </a:extLst>
+          </p:cNvPr>
+          <p:cNvPicPr>
+            <a:picLocks noChangeAspect="1"/>
+          </p:cNvPicPr>
+          <p:nvPr/>
+        </p:nvPicPr>
+        <p:blipFill>
+          <a:blip r:embed="rId2"/>
+          <a:srcRect l="890" t="1941" b="1941"/>
+          <a:stretch/>
+        </p:blipFill>
+        <p:spPr>
+          <a:xfrm>
+            <a:off x="-182880" y="0"/>
+            <a:ext cx="12374880" cy="6858000"/>
+          </a:xfrm>
+          <a:prstGeom prst="rect">
+            <a:avLst/>
+          </a:prstGeom>
+        </p:spPr>
+      </p:pic>
+      <p:pic>
+        <p:nvPicPr>
+          <p:cNvPr id="2" name="圖片 1">
+            <a:extLst>
+              <a:ext uri="{FF2B5EF4-FFF2-40B4-BE49-F238E27FC236}">
+                <a16:creationId xmlns:a16="http://schemas.microsoft.com/office/drawing/2014/main" id="{C0A57FF1-1A30-5788-7A0E-DAA8DB177C8F}"/>
+              </a:ext>
+            </a:extLst>
+          </p:cNvPr>
+          <p:cNvPicPr>
+            <a:picLocks noChangeAspect="1"/>
+          </p:cNvPicPr>
+          <p:nvPr/>
+        </p:nvPicPr>
+        <p:blipFill>
+          <a:blip r:embed="rId3" cstate="print">
+            <a:extLst>
+              <a:ext uri="{28A0092B-C50C-407E-A947-70E740481C1C}">
+                <a14:useLocalDpi xmlns:a14="http://schemas.microsoft.com/office/drawing/2010/main" val="0"/>
+              </a:ext>
+            </a:extLst>
+          </a:blip>
+          <a:srcRect/>
+          <a:stretch>
+            <a:fillRect/>
+          </a:stretch>
+        </p:blipFill>
+        <p:spPr bwMode="auto">
+          <a:xfrm>
+            <a:off x="2286730" y="585810"/>
+            <a:ext cx="7413041" cy="4235760"/>
+          </a:xfrm>
+          <a:prstGeom prst="rect">
+            <a:avLst/>
+          </a:prstGeom>
+          <a:noFill/>
+          <a:scene3d>
+            <a:camera prst="orthographicFront"/>
+            <a:lightRig rig="threePt" dir="t"/>
+          </a:scene3d>
+          <a:sp3d>
+            <a:bevelT/>
+          </a:sp3d>
+        </p:spPr>
+      </p:pic>
+      <p:sp>
+        <p:nvSpPr>
+          <p:cNvPr id="3" name="文字方塊 2">
+            <a:extLst>
+              <a:ext uri="{FF2B5EF4-FFF2-40B4-BE49-F238E27FC236}">
+                <a16:creationId xmlns:a16="http://schemas.microsoft.com/office/drawing/2014/main" id="{4AB4836E-E2CB-9822-8E55-5930372BD846}"/>
+              </a:ext>
+            </a:extLst>
+          </p:cNvPr>
+          <p:cNvSpPr txBox="1"/>
+          <p:nvPr/>
+        </p:nvSpPr>
+        <p:spPr>
+          <a:xfrm>
+            <a:off x="4765271" y="4888750"/>
+            <a:ext cx="2478578" cy="769441"/>
+          </a:xfrm>
+          <a:prstGeom prst="rect">
+            <a:avLst/>
+          </a:prstGeom>
+          <a:noFill/>
+        </p:spPr>
+        <p:txBody>
+          <a:bodyPr wrap="square" rtlCol="0">
+            <a:spAutoFit/>
+          </a:bodyPr>
+          <a:lstStyle/>
+          <a:p>
+            <a:pPr algn="ctr"/>
+            <a:r>
+              <a:rPr lang="zh-TW" altLang="en-US" sz="4400" dirty="0">
+                <a:ln w="19050">
+                  <a:solidFill>
+                    <a:schemeClr val="accent1">
+                      <a:lumMod val="75000"/>
+                    </a:schemeClr>
+                  </a:solidFill>
+                </a:ln>
+                <a:solidFill>
+                  <a:schemeClr val="bg1"/>
+                </a:solidFill>
+                <a:effectLst>
+                  <a:glow rad="63500">
+                    <a:schemeClr val="accent1">
+                      <a:satMod val="175000"/>
+                      <a:alpha val="40000"/>
+                    </a:schemeClr>
+                  </a:glow>
+                </a:effectLst>
+                <a:latin typeface="源泉圓體 H" panose="020B0A00000000000000" pitchFamily="34" charset="-120"/>
+                <a:ea typeface="源泉圓體 H" panose="020B0A00000000000000" pitchFamily="34" charset="-120"/>
+              </a:rPr>
+              <a:t>努　力</a:t>
+            </a:r>
+          </a:p>
+        </p:txBody>
+      </p:sp>
+    </p:spTree>
+    <p:extLst>
+      <p:ext uri="{BB962C8B-B14F-4D97-AF65-F5344CB8AC3E}">
+        <p14:creationId xmlns:p14="http://schemas.microsoft.com/office/powerpoint/2010/main" val="2533617655"/>
+      </p:ext>
+    </p:extLst>
+  </p:cSld>
+  <p:clrMapOvr>
+    <a:masterClrMapping/>
+  </p:clrMapOvr>
+  <mc:AlternateContent xmlns:mc="http://schemas.openxmlformats.org/markup-compatibility/2006">
+    <mc:Choice xmlns:p159="http://schemas.microsoft.com/office/powerpoint/2015/09/main" Requires="p159">
+      <p:transition xmlns:p14="http://schemas.microsoft.com/office/powerpoint/2010/main" spd="slow" p14:dur="2000">
+        <p159:morph option="byObject"/>
+      </p:transition>
+    </mc:Choice>
+    <mc:Fallback>
+      <p:transition spd="slow">
+        <p:fade/>
+      </p:transition>
+    </mc:Fallback>
+  </mc:AlternateContent>
+</p:sld>
+</file>
+
+<file path=ppt/slides/slide5.xml><?xml version="1.0" encoding="utf-8"?>
+<p:sld xmlns:a="http://schemas.openxmlformats.org/drawingml/2006/main" xmlns:r="http://schemas.openxmlformats.org/officeDocument/2006/relationships" xmlns:p="http://schemas.openxmlformats.org/presentationml/2006/main">
+  <p:cSld>
+    <p:spTree>
+      <p:nvGrpSpPr>
+        <p:cNvPr id="1" name=""/>
+        <p:cNvGrpSpPr/>
+        <p:nvPr/>
+      </p:nvGrpSpPr>
+      <p:grpSpPr>
+        <a:xfrm>
+          <a:off x="0" y="0"/>
+          <a:ext cx="0" cy="0"/>
+          <a:chOff x="0" y="0"/>
+          <a:chExt cx="0" cy="0"/>
+        </a:xfrm>
+      </p:grpSpPr>
+      <p:pic>
+        <p:nvPicPr>
+          <p:cNvPr id="6" name="圖片 5">
+            <a:extLst>
+              <a:ext uri="{FF2B5EF4-FFF2-40B4-BE49-F238E27FC236}">
+                <a16:creationId xmlns:a16="http://schemas.microsoft.com/office/drawing/2014/main" id="{D56FBA74-1197-5D02-6CA3-6D82D7AA8B18}"/>
+              </a:ext>
+            </a:extLst>
+          </p:cNvPr>
+          <p:cNvPicPr>
+            <a:picLocks noChangeAspect="1"/>
+          </p:cNvPicPr>
+          <p:nvPr/>
+        </p:nvPicPr>
+        <p:blipFill>
+          <a:blip r:embed="rId2"/>
+          <a:srcRect l="890" t="1941" b="1941"/>
+          <a:stretch/>
+        </p:blipFill>
+        <p:spPr>
+          <a:xfrm>
+            <a:off x="-182880" y="0"/>
+            <a:ext cx="12374880" cy="6858000"/>
+          </a:xfrm>
+          <a:prstGeom prst="rect">
+            <a:avLst/>
+          </a:prstGeom>
+        </p:spPr>
+      </p:pic>
+      <p:pic>
+        <p:nvPicPr>
+          <p:cNvPr id="3" name="圖片 2">
+            <a:extLst>
+              <a:ext uri="{FF2B5EF4-FFF2-40B4-BE49-F238E27FC236}">
+                <a16:creationId xmlns:a16="http://schemas.microsoft.com/office/drawing/2014/main" id="{AD17C86A-18E1-FB46-ADBF-B13A3468AC14}"/>
+              </a:ext>
+            </a:extLst>
+          </p:cNvPr>
+          <p:cNvPicPr>
+            <a:picLocks noChangeAspect="1"/>
+          </p:cNvPicPr>
+          <p:nvPr/>
+        </p:nvPicPr>
+        <p:blipFill>
+          <a:blip r:embed="rId3" cstate="print">
+            <a:extLst>
+              <a:ext uri="{28A0092B-C50C-407E-A947-70E740481C1C}">
+                <a14:useLocalDpi xmlns:a14="http://schemas.microsoft.com/office/drawing/2010/main" val="0"/>
+              </a:ext>
+            </a:extLst>
+          </a:blip>
+          <a:srcRect/>
+          <a:stretch>
+            <a:fillRect/>
+          </a:stretch>
+        </p:blipFill>
+        <p:spPr bwMode="auto">
+          <a:xfrm>
+            <a:off x="2286731" y="590982"/>
+            <a:ext cx="7408842" cy="4232824"/>
+          </a:xfrm>
+          <a:prstGeom prst="rect">
+            <a:avLst/>
+          </a:prstGeom>
+          <a:noFill/>
+          <a:scene3d>
+            <a:camera prst="orthographicFront"/>
+            <a:lightRig rig="threePt" dir="t"/>
+          </a:scene3d>
+          <a:sp3d>
+            <a:bevelT/>
+          </a:sp3d>
+        </p:spPr>
+      </p:pic>
+      <p:sp>
+        <p:nvSpPr>
+          <p:cNvPr id="4" name="文字方塊 3">
+            <a:extLst>
+              <a:ext uri="{FF2B5EF4-FFF2-40B4-BE49-F238E27FC236}">
+                <a16:creationId xmlns:a16="http://schemas.microsoft.com/office/drawing/2014/main" id="{1BD2EF12-6164-D43B-3778-C218BF13E8D4}"/>
+              </a:ext>
+            </a:extLst>
+          </p:cNvPr>
+          <p:cNvSpPr txBox="1"/>
+          <p:nvPr/>
+        </p:nvSpPr>
+        <p:spPr>
+          <a:xfrm>
+            <a:off x="4765271" y="4888750"/>
+            <a:ext cx="2478578" cy="769441"/>
+          </a:xfrm>
+          <a:prstGeom prst="rect">
+            <a:avLst/>
+          </a:prstGeom>
+          <a:noFill/>
+        </p:spPr>
+        <p:txBody>
+          <a:bodyPr wrap="square" rtlCol="0">
+            <a:spAutoFit/>
+          </a:bodyPr>
+          <a:lstStyle/>
+          <a:p>
+            <a:pPr algn="ctr"/>
+            <a:r>
+              <a:rPr lang="zh-TW" altLang="en-US" sz="4400" dirty="0">
+                <a:ln w="19050">
+                  <a:solidFill>
+                    <a:schemeClr val="accent1">
+                      <a:lumMod val="75000"/>
+                    </a:schemeClr>
+                  </a:solidFill>
+                </a:ln>
+                <a:solidFill>
+                  <a:schemeClr val="bg1"/>
+                </a:solidFill>
+                <a:effectLst>
+                  <a:glow rad="63500">
+                    <a:schemeClr val="accent1">
+                      <a:satMod val="175000"/>
+                      <a:alpha val="40000"/>
+                    </a:schemeClr>
+                  </a:glow>
+                </a:effectLst>
+                <a:latin typeface="源泉圓體 H" panose="020B0A00000000000000" pitchFamily="34" charset="-120"/>
+                <a:ea typeface="源泉圓體 H" panose="020B0A00000000000000" pitchFamily="34" charset="-120"/>
+              </a:rPr>
+              <a:t>意　外</a:t>
+            </a:r>
+          </a:p>
+        </p:txBody>
+      </p:sp>
+    </p:spTree>
+    <p:extLst>
+      <p:ext uri="{BB962C8B-B14F-4D97-AF65-F5344CB8AC3E}">
+        <p14:creationId xmlns:p14="http://schemas.microsoft.com/office/powerpoint/2010/main" val="2559042256"/>
+      </p:ext>
+    </p:extLst>
+  </p:cSld>
+  <p:clrMapOvr>
+    <a:masterClrMapping/>
+  </p:clrMapOvr>
+  <mc:AlternateContent xmlns:mc="http://schemas.openxmlformats.org/markup-compatibility/2006">
+    <mc:Choice xmlns:p159="http://schemas.microsoft.com/office/powerpoint/2015/09/main" Requires="p159">
+      <p:transition xmlns:p14="http://schemas.microsoft.com/office/powerpoint/2010/main" spd="slow" p14:dur="2000">
+        <p159:morph option="byObject"/>
+      </p:transition>
+    </mc:Choice>
+    <mc:Fallback>
+      <p:transition spd="slow">
+        <p:fade/>
+      </p:transition>
+    </mc:Fallback>
+  </mc:AlternateContent>
+</p:sld>
+</file>
+
+<file path=ppt/slides/slide6.xml><?xml version="1.0" encoding="utf-8"?>
+<p:sld xmlns:a="http://schemas.openxmlformats.org/drawingml/2006/main" xmlns:r="http://schemas.openxmlformats.org/officeDocument/2006/relationships" xmlns:p="http://schemas.openxmlformats.org/presentationml/2006/main">
+  <p:cSld>
+    <p:spTree>
+      <p:nvGrpSpPr>
+        <p:cNvPr id="1" name=""/>
+        <p:cNvGrpSpPr/>
+        <p:nvPr/>
+      </p:nvGrpSpPr>
+      <p:grpSpPr>
+        <a:xfrm>
+          <a:off x="0" y="0"/>
+          <a:ext cx="0" cy="0"/>
+          <a:chOff x="0" y="0"/>
+          <a:chExt cx="0" cy="0"/>
+        </a:xfrm>
+      </p:grpSpPr>
+      <p:pic>
+        <p:nvPicPr>
+          <p:cNvPr id="6" name="圖片 5">
+            <a:extLst>
+              <a:ext uri="{FF2B5EF4-FFF2-40B4-BE49-F238E27FC236}">
+                <a16:creationId xmlns:a16="http://schemas.microsoft.com/office/drawing/2014/main" id="{D56FBA74-1197-5D02-6CA3-6D82D7AA8B18}"/>
+              </a:ext>
+            </a:extLst>
+          </p:cNvPr>
+          <p:cNvPicPr>
+            <a:picLocks noChangeAspect="1"/>
+          </p:cNvPicPr>
+          <p:nvPr/>
+        </p:nvPicPr>
+        <p:blipFill>
+          <a:blip r:embed="rId2"/>
+          <a:srcRect l="890" t="1941" b="1941"/>
+          <a:stretch/>
+        </p:blipFill>
+        <p:spPr>
+          <a:xfrm>
+            <a:off x="-182880" y="0"/>
+            <a:ext cx="12374880" cy="6858000"/>
+          </a:xfrm>
+          <a:prstGeom prst="rect">
+            <a:avLst/>
+          </a:prstGeom>
+        </p:spPr>
+      </p:pic>
+      <p:pic>
+        <p:nvPicPr>
+          <p:cNvPr id="5" name="圖片 4">
+            <a:extLst>
+              <a:ext uri="{FF2B5EF4-FFF2-40B4-BE49-F238E27FC236}">
+                <a16:creationId xmlns:a16="http://schemas.microsoft.com/office/drawing/2014/main" id="{7F44E0A9-44FB-501B-2E77-C3BC8AC28C10}"/>
+              </a:ext>
+            </a:extLst>
+          </p:cNvPr>
+          <p:cNvPicPr>
+            <a:picLocks noChangeAspect="1"/>
+          </p:cNvPicPr>
+          <p:nvPr/>
+        </p:nvPicPr>
+        <p:blipFill>
+          <a:blip r:embed="rId3" cstate="print">
+            <a:extLst>
+              <a:ext uri="{28A0092B-C50C-407E-A947-70E740481C1C}">
+                <a14:useLocalDpi xmlns:a14="http://schemas.microsoft.com/office/drawing/2010/main" val="0"/>
+              </a:ext>
+            </a:extLst>
+          </a:blip>
+          <a:srcRect/>
+          <a:stretch>
+            <a:fillRect/>
+          </a:stretch>
+        </p:blipFill>
+        <p:spPr bwMode="auto">
+          <a:xfrm>
+            <a:off x="2286731" y="574356"/>
+            <a:ext cx="7408842" cy="4232824"/>
+          </a:xfrm>
+          <a:prstGeom prst="rect">
+            <a:avLst/>
+          </a:prstGeom>
+          <a:noFill/>
+          <a:scene3d>
+            <a:camera prst="orthographicFront"/>
+            <a:lightRig rig="threePt" dir="t"/>
+          </a:scene3d>
+          <a:sp3d>
+            <a:bevelT/>
+          </a:sp3d>
+        </p:spPr>
+      </p:pic>
+      <p:sp>
+        <p:nvSpPr>
+          <p:cNvPr id="4" name="文字方塊 3">
+            <a:extLst>
+              <a:ext uri="{FF2B5EF4-FFF2-40B4-BE49-F238E27FC236}">
+                <a16:creationId xmlns:a16="http://schemas.microsoft.com/office/drawing/2014/main" id="{FDBBD53A-D281-0B87-81E3-9C94EE4A134A}"/>
+              </a:ext>
+            </a:extLst>
+          </p:cNvPr>
+          <p:cNvSpPr txBox="1"/>
+          <p:nvPr/>
+        </p:nvSpPr>
+        <p:spPr>
+          <a:xfrm>
+            <a:off x="4765271" y="4888750"/>
+            <a:ext cx="2478578" cy="769441"/>
+          </a:xfrm>
+          <a:prstGeom prst="rect">
+            <a:avLst/>
+          </a:prstGeom>
+          <a:noFill/>
+        </p:spPr>
+        <p:txBody>
+          <a:bodyPr wrap="square" rtlCol="0">
+            <a:spAutoFit/>
+          </a:bodyPr>
+          <a:lstStyle/>
+          <a:p>
+            <a:pPr algn="ctr"/>
+            <a:r>
+              <a:rPr lang="zh-TW" altLang="en-US" sz="4400" dirty="0">
+                <a:ln w="19050">
+                  <a:solidFill>
+                    <a:schemeClr val="accent1">
+                      <a:lumMod val="75000"/>
+                    </a:schemeClr>
+                  </a:solidFill>
+                </a:ln>
+                <a:solidFill>
+                  <a:schemeClr val="bg1"/>
+                </a:solidFill>
+                <a:effectLst>
+                  <a:glow rad="63500">
+                    <a:schemeClr val="accent1">
+                      <a:satMod val="175000"/>
+                      <a:alpha val="40000"/>
+                    </a:schemeClr>
+                  </a:glow>
+                </a:effectLst>
+                <a:latin typeface="源泉圓體 H" panose="020B0A00000000000000" pitchFamily="34" charset="-120"/>
+                <a:ea typeface="源泉圓體 H" panose="020B0A00000000000000" pitchFamily="34" charset="-120"/>
+              </a:rPr>
+              <a:t>轉　彎</a:t>
+            </a:r>
+          </a:p>
+        </p:txBody>
+      </p:sp>
+    </p:spTree>
+    <p:extLst>
+      <p:ext uri="{BB962C8B-B14F-4D97-AF65-F5344CB8AC3E}">
+        <p14:creationId xmlns:p14="http://schemas.microsoft.com/office/powerpoint/2010/main" val="2598621863"/>
+      </p:ext>
+    </p:extLst>
+  </p:cSld>
+  <p:clrMapOvr>
+    <a:masterClrMapping/>
+  </p:clrMapOvr>
+  <mc:AlternateContent xmlns:mc="http://schemas.openxmlformats.org/markup-compatibility/2006">
+    <mc:Choice xmlns:p159="http://schemas.microsoft.com/office/powerpoint/2015/09/main" Requires="p159">
+      <p:transition xmlns:p14="http://schemas.microsoft.com/office/powerpoint/2010/main" spd="slow" p14:dur="2000">
+        <p159:morph option="byObject"/>
+      </p:transition>
+    </mc:Choice>
+    <mc:Fallback>
+      <p:transition spd="slow">
+        <p:fade/>
+      </p:transition>
+    </mc:Fallback>
+  </mc:AlternateContent>
+</p:sld>
+</file>
+
+<file path=ppt/slides/slide7.xml><?xml version="1.0" encoding="utf-8"?>
+<p:sld xmlns:a="http://schemas.openxmlformats.org/drawingml/2006/main" xmlns:r="http://schemas.openxmlformats.org/officeDocument/2006/relationships" xmlns:p="http://schemas.openxmlformats.org/presentationml/2006/main">
+  <p:cSld>
+    <p:spTree>
+      <p:nvGrpSpPr>
+        <p:cNvPr id="1" name=""/>
+        <p:cNvGrpSpPr/>
+        <p:nvPr/>
+      </p:nvGrpSpPr>
+      <p:grpSpPr>
+        <a:xfrm>
+          <a:off x="0" y="0"/>
+          <a:ext cx="0" cy="0"/>
+          <a:chOff x="0" y="0"/>
+          <a:chExt cx="0" cy="0"/>
+        </a:xfrm>
+      </p:grpSpPr>
+      <p:pic>
+        <p:nvPicPr>
+          <p:cNvPr id="6" name="圖片 5">
+            <a:extLst>
+              <a:ext uri="{FF2B5EF4-FFF2-40B4-BE49-F238E27FC236}">
+                <a16:creationId xmlns:a16="http://schemas.microsoft.com/office/drawing/2014/main" id="{D56FBA74-1197-5D02-6CA3-6D82D7AA8B18}"/>
+              </a:ext>
+            </a:extLst>
+          </p:cNvPr>
+          <p:cNvPicPr>
+            <a:picLocks noChangeAspect="1"/>
+          </p:cNvPicPr>
+          <p:nvPr/>
+        </p:nvPicPr>
+        <p:blipFill>
+          <a:blip r:embed="rId2"/>
+          <a:srcRect l="890" t="1941" b="1941"/>
+          <a:stretch/>
+        </p:blipFill>
+        <p:spPr>
+          <a:xfrm>
+            <a:off x="-182880" y="0"/>
+            <a:ext cx="12374880" cy="6858000"/>
+          </a:xfrm>
+          <a:prstGeom prst="rect">
+            <a:avLst/>
+          </a:prstGeom>
+        </p:spPr>
+      </p:pic>
+      <p:pic>
+        <p:nvPicPr>
+          <p:cNvPr id="4" name="圖片 3">
+            <a:extLst>
+              <a:ext uri="{FF2B5EF4-FFF2-40B4-BE49-F238E27FC236}">
+                <a16:creationId xmlns:a16="http://schemas.microsoft.com/office/drawing/2014/main" id="{9DA224BD-1B08-C03A-21D7-341E3E3D945D}"/>
+              </a:ext>
+            </a:extLst>
+          </p:cNvPr>
+          <p:cNvPicPr>
+            <a:picLocks noChangeAspect="1"/>
+          </p:cNvPicPr>
+          <p:nvPr/>
+        </p:nvPicPr>
+        <p:blipFill>
+          <a:blip r:embed="rId3" cstate="print">
+            <a:extLst>
+              <a:ext uri="{28A0092B-C50C-407E-A947-70E740481C1C}">
+                <a14:useLocalDpi xmlns:a14="http://schemas.microsoft.com/office/drawing/2010/main" val="0"/>
+              </a:ext>
+            </a:extLst>
+          </a:blip>
+          <a:srcRect/>
+          <a:stretch>
+            <a:fillRect/>
+          </a:stretch>
+        </p:blipFill>
+        <p:spPr bwMode="auto">
+          <a:xfrm>
+            <a:off x="2274166" y="585809"/>
+            <a:ext cx="7413041" cy="4236563"/>
+          </a:xfrm>
+          <a:prstGeom prst="rect">
+            <a:avLst/>
+          </a:prstGeom>
+          <a:noFill/>
+          <a:scene3d>
+            <a:camera prst="orthographicFront"/>
+            <a:lightRig rig="threePt" dir="t"/>
+          </a:scene3d>
+          <a:sp3d>
+            <a:bevelT/>
+          </a:sp3d>
+        </p:spPr>
+      </p:pic>
+      <p:sp>
+        <p:nvSpPr>
+          <p:cNvPr id="3" name="文字方塊 2">
+            <a:extLst>
+              <a:ext uri="{FF2B5EF4-FFF2-40B4-BE49-F238E27FC236}">
+                <a16:creationId xmlns:a16="http://schemas.microsoft.com/office/drawing/2014/main" id="{4AB4836E-E2CB-9822-8E55-5930372BD846}"/>
+              </a:ext>
+            </a:extLst>
+          </p:cNvPr>
+          <p:cNvSpPr txBox="1"/>
+          <p:nvPr/>
+        </p:nvSpPr>
+        <p:spPr>
+          <a:xfrm>
+            <a:off x="4765271" y="4888750"/>
+            <a:ext cx="2478578" cy="769441"/>
+          </a:xfrm>
+          <a:prstGeom prst="rect">
+            <a:avLst/>
+          </a:prstGeom>
+          <a:noFill/>
+        </p:spPr>
+        <p:txBody>
+          <a:bodyPr wrap="square" rtlCol="0">
+            <a:spAutoFit/>
+          </a:bodyPr>
+          <a:lstStyle/>
+          <a:p>
+            <a:pPr algn="ctr"/>
+            <a:r>
+              <a:rPr lang="zh-TW" altLang="en-US" sz="4400" dirty="0">
+                <a:ln w="19050">
+                  <a:solidFill>
+                    <a:schemeClr val="accent1">
+                      <a:lumMod val="75000"/>
+                    </a:schemeClr>
+                  </a:solidFill>
+                </a:ln>
+                <a:solidFill>
+                  <a:schemeClr val="bg1"/>
+                </a:solidFill>
+                <a:effectLst>
+                  <a:glow rad="63500">
+                    <a:schemeClr val="accent1">
+                      <a:satMod val="175000"/>
+                      <a:alpha val="40000"/>
+                    </a:schemeClr>
+                  </a:glow>
+                </a:effectLst>
+                <a:latin typeface="源泉圓體 H" panose="020B0A00000000000000" pitchFamily="34" charset="-120"/>
+                <a:ea typeface="源泉圓體 H" panose="020B0A00000000000000" pitchFamily="34" charset="-120"/>
+              </a:rPr>
+              <a:t>結　果</a:t>
+            </a:r>
+          </a:p>
+        </p:txBody>
+      </p:sp>
+    </p:spTree>
+    <p:extLst>
+      <p:ext uri="{BB962C8B-B14F-4D97-AF65-F5344CB8AC3E}">
+        <p14:creationId xmlns:p14="http://schemas.microsoft.com/office/powerpoint/2010/main" val="3039653470"/>
+      </p:ext>
+    </p:extLst>
+  </p:cSld>
+  <p:clrMapOvr>
+    <a:masterClrMapping/>
+  </p:clrMapOvr>
+  <mc:AlternateContent xmlns:mc="http://schemas.openxmlformats.org/markup-compatibility/2006">
+    <mc:Choice xmlns:p159="http://schemas.microsoft.com/office/powerpoint/2015/09/main" Requires="p159">
+      <p:transition xmlns:p14="http://schemas.microsoft.com/office/powerpoint/2010/main" spd="slow" p14:dur="2000">
+        <p159:morph option="byObject"/>
+      </p:transition>
+    </mc:Choice>
+    <mc:Fallback>
+      <p:transition spd="slow">
+        <p:fade/>
+      </p:transition>
+    </mc:Fallback>
+  </mc:AlternateContent>
+</p:sld>
+</file>
+
+<file path=ppt/slides/slide8.xml><?xml version="1.0" encoding="utf-8"?>
+<p:sld xmlns:a="http://schemas.openxmlformats.org/drawingml/2006/main" xmlns:r="http://schemas.openxmlformats.org/officeDocument/2006/relationships" xmlns:p="http://schemas.openxmlformats.org/presentationml/2006/main">
+  <p:cSld>
+    <p:spTree>
+      <p:nvGrpSpPr>
+        <p:cNvPr id="1" name=""/>
+        <p:cNvGrpSpPr/>
+        <p:nvPr/>
+      </p:nvGrpSpPr>
+      <p:grpSpPr>
+        <a:xfrm>
+          <a:off x="0" y="0"/>
+          <a:ext cx="0" cy="0"/>
+          <a:chOff x="0" y="0"/>
+          <a:chExt cx="0" cy="0"/>
+        </a:xfrm>
+      </p:grpSpPr>
+      <p:pic>
+        <p:nvPicPr>
+          <p:cNvPr id="6" name="圖片 5">
+            <a:extLst>
+              <a:ext uri="{FF2B5EF4-FFF2-40B4-BE49-F238E27FC236}">
+                <a16:creationId xmlns:a16="http://schemas.microsoft.com/office/drawing/2014/main" id="{D56FBA74-1197-5D02-6CA3-6D82D7AA8B18}"/>
+              </a:ext>
+            </a:extLst>
+          </p:cNvPr>
+          <p:cNvPicPr>
+            <a:picLocks noChangeAspect="1"/>
+          </p:cNvPicPr>
+          <p:nvPr/>
+        </p:nvPicPr>
+        <p:blipFill>
+          <a:blip r:embed="rId2"/>
+          <a:srcRect l="890" t="1941" b="1941"/>
+          <a:stretch/>
+        </p:blipFill>
+        <p:spPr>
+          <a:xfrm>
+            <a:off x="-182880" y="0"/>
+            <a:ext cx="12374880" cy="6858000"/>
+          </a:xfrm>
+          <a:prstGeom prst="rect">
+            <a:avLst/>
+          </a:prstGeom>
+        </p:spPr>
+      </p:pic>
+      <p:pic>
+        <p:nvPicPr>
+          <p:cNvPr id="2" name="圖片 1">
+            <a:extLst>
+              <a:ext uri="{FF2B5EF4-FFF2-40B4-BE49-F238E27FC236}">
+                <a16:creationId xmlns:a16="http://schemas.microsoft.com/office/drawing/2014/main" id="{58821F72-01FC-1F27-172C-AE775BA3AC10}"/>
+              </a:ext>
+            </a:extLst>
+          </p:cNvPr>
+          <p:cNvPicPr>
+            <a:picLocks noChangeAspect="1"/>
+          </p:cNvPicPr>
+          <p:nvPr/>
+        </p:nvPicPr>
+        <p:blipFill>
+          <a:blip r:embed="rId3" cstate="print">
+            <a:extLst>
+              <a:ext uri="{28A0092B-C50C-407E-A947-70E740481C1C}">
+                <a14:useLocalDpi xmlns:a14="http://schemas.microsoft.com/office/drawing/2010/main" val="0"/>
+              </a:ext>
+            </a:extLst>
+          </a:blip>
+          <a:srcRect/>
+          <a:stretch>
+            <a:fillRect/>
+          </a:stretch>
+        </p:blipFill>
+        <p:spPr bwMode="auto">
+          <a:xfrm>
+            <a:off x="2286730" y="590982"/>
+            <a:ext cx="7407903" cy="4232824"/>
+          </a:xfrm>
+          <a:prstGeom prst="rect">
+            <a:avLst/>
+          </a:prstGeom>
+          <a:noFill/>
+          <a:scene3d>
+            <a:camera prst="orthographicFront"/>
+            <a:lightRig rig="threePt" dir="t"/>
+          </a:scene3d>
+          <a:sp3d>
+            <a:bevelT/>
+          </a:sp3d>
+        </p:spPr>
+      </p:pic>
+      <p:sp>
+        <p:nvSpPr>
+          <p:cNvPr id="3" name="文字方塊 2">
+            <a:extLst>
+              <a:ext uri="{FF2B5EF4-FFF2-40B4-BE49-F238E27FC236}">
+                <a16:creationId xmlns:a16="http://schemas.microsoft.com/office/drawing/2014/main" id="{BDE5E79A-4394-E8C5-5350-722A41073F1D}"/>
+              </a:ext>
+            </a:extLst>
+          </p:cNvPr>
+          <p:cNvSpPr txBox="1"/>
+          <p:nvPr/>
+        </p:nvSpPr>
+        <p:spPr>
+          <a:xfrm>
+            <a:off x="4765271" y="4888750"/>
+            <a:ext cx="2478578" cy="769441"/>
+          </a:xfrm>
+          <a:prstGeom prst="rect">
+            <a:avLst/>
+          </a:prstGeom>
+          <a:noFill/>
+        </p:spPr>
+        <p:txBody>
+          <a:bodyPr wrap="square" rtlCol="0">
+            <a:spAutoFit/>
+          </a:bodyPr>
+          <a:lstStyle/>
+          <a:p>
+            <a:pPr algn="ctr"/>
+            <a:r>
+              <a:rPr lang="zh-TW" altLang="en-US" sz="4400" dirty="0">
+                <a:ln w="19050">
+                  <a:solidFill>
+                    <a:schemeClr val="accent1">
+                      <a:lumMod val="75000"/>
+                    </a:schemeClr>
+                  </a:solidFill>
+                </a:ln>
+                <a:solidFill>
+                  <a:schemeClr val="bg1"/>
+                </a:solidFill>
+                <a:effectLst>
+                  <a:glow rad="63500">
+                    <a:schemeClr val="accent1">
+                      <a:satMod val="175000"/>
+                      <a:alpha val="40000"/>
+                    </a:schemeClr>
+                  </a:glow>
+                </a:effectLst>
+                <a:latin typeface="源泉圓體 H" panose="020B0A00000000000000" pitchFamily="34" charset="-120"/>
+                <a:ea typeface="源泉圓體 H" panose="020B0A00000000000000" pitchFamily="34" charset="-120"/>
+              </a:rPr>
+              <a:t>結　局</a:t>
+            </a:r>
+          </a:p>
+        </p:txBody>
+      </p:sp>
+    </p:spTree>
+    <p:extLst>
+      <p:ext uri="{BB962C8B-B14F-4D97-AF65-F5344CB8AC3E}">
+        <p14:creationId xmlns:p14="http://schemas.microsoft.com/office/powerpoint/2010/main" val="1241358013"/>
+      </p:ext>
+    </p:extLst>
+  </p:cSld>
+  <p:clrMapOvr>
+    <a:masterClrMapping/>
+  </p:clrMapOvr>
+  <mc:AlternateContent xmlns:mc="http://schemas.openxmlformats.org/markup-compatibility/2006">
+    <mc:Choice xmlns:p159="http://schemas.microsoft.com/office/powerpoint/2015/09/main" Requires="p159">
+      <p:transition xmlns:p14="http://schemas.microsoft.com/office/powerpoint/2010/main" spd="slow" p14:dur="2000">
+        <p159:morph option="byObject"/>
+      </p:transition>
+    </mc:Choice>
+    <mc:Fallback>
+      <p:transition spd="slow">
+        <p:fade/>
+      </p:transition>
+    </mc:Fallback>
+  </mc:AlternateContent>
 </p:sld>
 </file>
 

--- a/hw01.pptx
+++ b/hw01.pptx
@@ -4,6 +4,9 @@
   <p:sldMasterIdLst>
     <p:sldMasterId id="2147483648" r:id="rId1"/>
   </p:sldMasterIdLst>
+  <p:notesMasterIdLst>
+    <p:notesMasterId r:id="rId10"/>
+  </p:notesMasterIdLst>
   <p:sldIdLst>
     <p:sldId id="262" r:id="rId2"/>
     <p:sldId id="256" r:id="rId3"/>
@@ -117,6 +120,1186 @@
     </p:ext>
   </p:extLst>
 </p:presentation>
+</file>
+
+<file path=ppt/notesMasters/notesMaster1.xml><?xml version="1.0" encoding="utf-8"?>
+<p:notesMaster xmlns:a="http://schemas.openxmlformats.org/drawingml/2006/main" xmlns:r="http://schemas.openxmlformats.org/officeDocument/2006/relationships" xmlns:p="http://schemas.openxmlformats.org/presentationml/2006/main">
+  <p:cSld>
+    <p:bg>
+      <p:bgRef idx="1001">
+        <a:schemeClr val="bg1"/>
+      </p:bgRef>
+    </p:bg>
+    <p:spTree>
+      <p:nvGrpSpPr>
+        <p:cNvPr id="1" name=""/>
+        <p:cNvGrpSpPr/>
+        <p:nvPr/>
+      </p:nvGrpSpPr>
+      <p:grpSpPr>
+        <a:xfrm>
+          <a:off x="0" y="0"/>
+          <a:ext cx="0" cy="0"/>
+          <a:chOff x="0" y="0"/>
+          <a:chExt cx="0" cy="0"/>
+        </a:xfrm>
+      </p:grpSpPr>
+      <p:sp>
+        <p:nvSpPr>
+          <p:cNvPr id="2" name="頁首版面配置區 1"/>
+          <p:cNvSpPr>
+            <a:spLocks noGrp="1"/>
+          </p:cNvSpPr>
+          <p:nvPr>
+            <p:ph type="hdr" sz="quarter"/>
+          </p:nvPr>
+        </p:nvSpPr>
+        <p:spPr>
+          <a:xfrm>
+            <a:off x="0" y="0"/>
+            <a:ext cx="2971800" cy="458788"/>
+          </a:xfrm>
+          <a:prstGeom prst="rect">
+            <a:avLst/>
+          </a:prstGeom>
+        </p:spPr>
+        <p:txBody>
+          <a:bodyPr vert="horz" lIns="91440" tIns="45720" rIns="91440" bIns="45720" rtlCol="0"/>
+          <a:lstStyle>
+            <a:lvl1pPr algn="l">
+              <a:defRPr sz="1200"/>
+            </a:lvl1pPr>
+          </a:lstStyle>
+          <a:p>
+            <a:endParaRPr lang="zh-TW" altLang="en-US"/>
+          </a:p>
+        </p:txBody>
+      </p:sp>
+      <p:sp>
+        <p:nvSpPr>
+          <p:cNvPr id="3" name="日期版面配置區 2"/>
+          <p:cNvSpPr>
+            <a:spLocks noGrp="1"/>
+          </p:cNvSpPr>
+          <p:nvPr>
+            <p:ph type="dt" idx="1"/>
+          </p:nvPr>
+        </p:nvSpPr>
+        <p:spPr>
+          <a:xfrm>
+            <a:off x="3884613" y="0"/>
+            <a:ext cx="2971800" cy="458788"/>
+          </a:xfrm>
+          <a:prstGeom prst="rect">
+            <a:avLst/>
+          </a:prstGeom>
+        </p:spPr>
+        <p:txBody>
+          <a:bodyPr vert="horz" lIns="91440" tIns="45720" rIns="91440" bIns="45720" rtlCol="0"/>
+          <a:lstStyle>
+            <a:lvl1pPr algn="r">
+              <a:defRPr sz="1200"/>
+            </a:lvl1pPr>
+          </a:lstStyle>
+          <a:p>
+            <a:fld id="{63F2F026-FB5B-4E26-A90C-1D599B641915}" type="datetimeFigureOut">
+              <a:rPr lang="zh-TW" altLang="en-US" smtClean="0"/>
+              <a:t>2024/10/20</a:t>
+            </a:fld>
+            <a:endParaRPr lang="zh-TW" altLang="en-US"/>
+          </a:p>
+        </p:txBody>
+      </p:sp>
+      <p:sp>
+        <p:nvSpPr>
+          <p:cNvPr id="4" name="投影片影像版面配置區 3"/>
+          <p:cNvSpPr>
+            <a:spLocks noGrp="1" noRot="1" noChangeAspect="1"/>
+          </p:cNvSpPr>
+          <p:nvPr>
+            <p:ph type="sldImg" idx="2"/>
+          </p:nvPr>
+        </p:nvSpPr>
+        <p:spPr>
+          <a:xfrm>
+            <a:off x="685800" y="1143000"/>
+            <a:ext cx="5486400" cy="3086100"/>
+          </a:xfrm>
+          <a:prstGeom prst="rect">
+            <a:avLst/>
+          </a:prstGeom>
+          <a:noFill/>
+          <a:ln w="12700">
+            <a:solidFill>
+              <a:prstClr val="black"/>
+            </a:solidFill>
+          </a:ln>
+        </p:spPr>
+        <p:txBody>
+          <a:bodyPr vert="horz" lIns="91440" tIns="45720" rIns="91440" bIns="45720" rtlCol="0" anchor="ctr"/>
+          <a:lstStyle/>
+          <a:p>
+            <a:endParaRPr lang="zh-TW" altLang="en-US"/>
+          </a:p>
+        </p:txBody>
+      </p:sp>
+      <p:sp>
+        <p:nvSpPr>
+          <p:cNvPr id="5" name="備忘稿版面配置區 4"/>
+          <p:cNvSpPr>
+            <a:spLocks noGrp="1"/>
+          </p:cNvSpPr>
+          <p:nvPr>
+            <p:ph type="body" sz="quarter" idx="3"/>
+          </p:nvPr>
+        </p:nvSpPr>
+        <p:spPr>
+          <a:xfrm>
+            <a:off x="685800" y="4400550"/>
+            <a:ext cx="5486400" cy="3600450"/>
+          </a:xfrm>
+          <a:prstGeom prst="rect">
+            <a:avLst/>
+          </a:prstGeom>
+        </p:spPr>
+        <p:txBody>
+          <a:bodyPr vert="horz" lIns="91440" tIns="45720" rIns="91440" bIns="45720" rtlCol="0"/>
+          <a:lstStyle/>
+          <a:p>
+            <a:pPr lvl="0"/>
+            <a:r>
+              <a:rPr lang="zh-TW" altLang="en-US"/>
+              <a:t>按一下以編輯母片文字樣式</a:t>
+            </a:r>
+          </a:p>
+          <a:p>
+            <a:pPr lvl="1"/>
+            <a:r>
+              <a:rPr lang="zh-TW" altLang="en-US"/>
+              <a:t>第二層</a:t>
+            </a:r>
+          </a:p>
+          <a:p>
+            <a:pPr lvl="2"/>
+            <a:r>
+              <a:rPr lang="zh-TW" altLang="en-US"/>
+              <a:t>第三層</a:t>
+            </a:r>
+          </a:p>
+          <a:p>
+            <a:pPr lvl="3"/>
+            <a:r>
+              <a:rPr lang="zh-TW" altLang="en-US"/>
+              <a:t>第四層</a:t>
+            </a:r>
+          </a:p>
+          <a:p>
+            <a:pPr lvl="4"/>
+            <a:r>
+              <a:rPr lang="zh-TW" altLang="en-US"/>
+              <a:t>第五層</a:t>
+            </a:r>
+          </a:p>
+        </p:txBody>
+      </p:sp>
+      <p:sp>
+        <p:nvSpPr>
+          <p:cNvPr id="6" name="頁尾版面配置區 5"/>
+          <p:cNvSpPr>
+            <a:spLocks noGrp="1"/>
+          </p:cNvSpPr>
+          <p:nvPr>
+            <p:ph type="ftr" sz="quarter" idx="4"/>
+          </p:nvPr>
+        </p:nvSpPr>
+        <p:spPr>
+          <a:xfrm>
+            <a:off x="0" y="8685213"/>
+            <a:ext cx="2971800" cy="458787"/>
+          </a:xfrm>
+          <a:prstGeom prst="rect">
+            <a:avLst/>
+          </a:prstGeom>
+        </p:spPr>
+        <p:txBody>
+          <a:bodyPr vert="horz" lIns="91440" tIns="45720" rIns="91440" bIns="45720" rtlCol="0" anchor="b"/>
+          <a:lstStyle>
+            <a:lvl1pPr algn="l">
+              <a:defRPr sz="1200"/>
+            </a:lvl1pPr>
+          </a:lstStyle>
+          <a:p>
+            <a:endParaRPr lang="zh-TW" altLang="en-US"/>
+          </a:p>
+        </p:txBody>
+      </p:sp>
+      <p:sp>
+        <p:nvSpPr>
+          <p:cNvPr id="7" name="投影片編號版面配置區 6"/>
+          <p:cNvSpPr>
+            <a:spLocks noGrp="1"/>
+          </p:cNvSpPr>
+          <p:nvPr>
+            <p:ph type="sldNum" sz="quarter" idx="5"/>
+          </p:nvPr>
+        </p:nvSpPr>
+        <p:spPr>
+          <a:xfrm>
+            <a:off x="3884613" y="8685213"/>
+            <a:ext cx="2971800" cy="458787"/>
+          </a:xfrm>
+          <a:prstGeom prst="rect">
+            <a:avLst/>
+          </a:prstGeom>
+        </p:spPr>
+        <p:txBody>
+          <a:bodyPr vert="horz" lIns="91440" tIns="45720" rIns="91440" bIns="45720" rtlCol="0" anchor="b"/>
+          <a:lstStyle>
+            <a:lvl1pPr algn="r">
+              <a:defRPr sz="1200"/>
+            </a:lvl1pPr>
+          </a:lstStyle>
+          <a:p>
+            <a:fld id="{A8AD5A02-2B1A-49AE-91C3-899D0DA4E90C}" type="slidenum">
+              <a:rPr lang="zh-TW" altLang="en-US" smtClean="0"/>
+              <a:t>‹#›</a:t>
+            </a:fld>
+            <a:endParaRPr lang="zh-TW" altLang="en-US"/>
+          </a:p>
+        </p:txBody>
+      </p:sp>
+    </p:spTree>
+    <p:extLst>
+      <p:ext uri="{BB962C8B-B14F-4D97-AF65-F5344CB8AC3E}">
+        <p14:creationId xmlns:p14="http://schemas.microsoft.com/office/powerpoint/2010/main" val="3789611697"/>
+      </p:ext>
+    </p:extLst>
+  </p:cSld>
+  <p:clrMap bg1="lt1" tx1="dk1" bg2="lt2" tx2="dk2" accent1="accent1" accent2="accent2" accent3="accent3" accent4="accent4" accent5="accent5" accent6="accent6" hlink="hlink" folHlink="folHlink"/>
+  <p:notesStyle>
+    <a:lvl1pPr marL="0" algn="l" defTabSz="914400" rtl="0" eaLnBrk="1" latinLnBrk="0" hangingPunct="1">
+      <a:defRPr sz="1200" kern="1200">
+        <a:solidFill>
+          <a:schemeClr val="tx1"/>
+        </a:solidFill>
+        <a:latin typeface="+mn-lt"/>
+        <a:ea typeface="+mn-ea"/>
+        <a:cs typeface="+mn-cs"/>
+      </a:defRPr>
+    </a:lvl1pPr>
+    <a:lvl2pPr marL="457200" algn="l" defTabSz="914400" rtl="0" eaLnBrk="1" latinLnBrk="0" hangingPunct="1">
+      <a:defRPr sz="1200" kern="1200">
+        <a:solidFill>
+          <a:schemeClr val="tx1"/>
+        </a:solidFill>
+        <a:latin typeface="+mn-lt"/>
+        <a:ea typeface="+mn-ea"/>
+        <a:cs typeface="+mn-cs"/>
+      </a:defRPr>
+    </a:lvl2pPr>
+    <a:lvl3pPr marL="914400" algn="l" defTabSz="914400" rtl="0" eaLnBrk="1" latinLnBrk="0" hangingPunct="1">
+      <a:defRPr sz="1200" kern="1200">
+        <a:solidFill>
+          <a:schemeClr val="tx1"/>
+        </a:solidFill>
+        <a:latin typeface="+mn-lt"/>
+        <a:ea typeface="+mn-ea"/>
+        <a:cs typeface="+mn-cs"/>
+      </a:defRPr>
+    </a:lvl3pPr>
+    <a:lvl4pPr marL="1371600" algn="l" defTabSz="914400" rtl="0" eaLnBrk="1" latinLnBrk="0" hangingPunct="1">
+      <a:defRPr sz="1200" kern="1200">
+        <a:solidFill>
+          <a:schemeClr val="tx1"/>
+        </a:solidFill>
+        <a:latin typeface="+mn-lt"/>
+        <a:ea typeface="+mn-ea"/>
+        <a:cs typeface="+mn-cs"/>
+      </a:defRPr>
+    </a:lvl4pPr>
+    <a:lvl5pPr marL="1828800" algn="l" defTabSz="914400" rtl="0" eaLnBrk="1" latinLnBrk="0" hangingPunct="1">
+      <a:defRPr sz="1200" kern="1200">
+        <a:solidFill>
+          <a:schemeClr val="tx1"/>
+        </a:solidFill>
+        <a:latin typeface="+mn-lt"/>
+        <a:ea typeface="+mn-ea"/>
+        <a:cs typeface="+mn-cs"/>
+      </a:defRPr>
+    </a:lvl5pPr>
+    <a:lvl6pPr marL="2286000" algn="l" defTabSz="914400" rtl="0" eaLnBrk="1" latinLnBrk="0" hangingPunct="1">
+      <a:defRPr sz="1200" kern="1200">
+        <a:solidFill>
+          <a:schemeClr val="tx1"/>
+        </a:solidFill>
+        <a:latin typeface="+mn-lt"/>
+        <a:ea typeface="+mn-ea"/>
+        <a:cs typeface="+mn-cs"/>
+      </a:defRPr>
+    </a:lvl6pPr>
+    <a:lvl7pPr marL="2743200" algn="l" defTabSz="914400" rtl="0" eaLnBrk="1" latinLnBrk="0" hangingPunct="1">
+      <a:defRPr sz="1200" kern="1200">
+        <a:solidFill>
+          <a:schemeClr val="tx1"/>
+        </a:solidFill>
+        <a:latin typeface="+mn-lt"/>
+        <a:ea typeface="+mn-ea"/>
+        <a:cs typeface="+mn-cs"/>
+      </a:defRPr>
+    </a:lvl7pPr>
+    <a:lvl8pPr marL="3200400" algn="l" defTabSz="914400" rtl="0" eaLnBrk="1" latinLnBrk="0" hangingPunct="1">
+      <a:defRPr sz="1200" kern="1200">
+        <a:solidFill>
+          <a:schemeClr val="tx1"/>
+        </a:solidFill>
+        <a:latin typeface="+mn-lt"/>
+        <a:ea typeface="+mn-ea"/>
+        <a:cs typeface="+mn-cs"/>
+      </a:defRPr>
+    </a:lvl8pPr>
+    <a:lvl9pPr marL="3657600" algn="l" defTabSz="914400" rtl="0" eaLnBrk="1" latinLnBrk="0" hangingPunct="1">
+      <a:defRPr sz="1200" kern="1200">
+        <a:solidFill>
+          <a:schemeClr val="tx1"/>
+        </a:solidFill>
+        <a:latin typeface="+mn-lt"/>
+        <a:ea typeface="+mn-ea"/>
+        <a:cs typeface="+mn-cs"/>
+      </a:defRPr>
+    </a:lvl9pPr>
+  </p:notesStyle>
+</p:notesMaster>
+</file>
+
+<file path=ppt/notesSlides/notesSlide1.xml><?xml version="1.0" encoding="utf-8"?>
+<p:notes xmlns:a="http://schemas.openxmlformats.org/drawingml/2006/main" xmlns:r="http://schemas.openxmlformats.org/officeDocument/2006/relationships" xmlns:p="http://schemas.openxmlformats.org/presentationml/2006/main">
+  <p:cSld>
+    <p:spTree>
+      <p:nvGrpSpPr>
+        <p:cNvPr id="1" name=""/>
+        <p:cNvGrpSpPr/>
+        <p:nvPr/>
+      </p:nvGrpSpPr>
+      <p:grpSpPr>
+        <a:xfrm>
+          <a:off x="0" y="0"/>
+          <a:ext cx="0" cy="0"/>
+          <a:chOff x="0" y="0"/>
+          <a:chExt cx="0" cy="0"/>
+        </a:xfrm>
+      </p:grpSpPr>
+      <p:sp>
+        <p:nvSpPr>
+          <p:cNvPr id="2" name="投影片影像版面配置區 1"/>
+          <p:cNvSpPr>
+            <a:spLocks noGrp="1" noRot="1" noChangeAspect="1"/>
+          </p:cNvSpPr>
+          <p:nvPr>
+            <p:ph type="sldImg"/>
+          </p:nvPr>
+        </p:nvSpPr>
+        <p:spPr/>
+      </p:sp>
+      <p:sp>
+        <p:nvSpPr>
+          <p:cNvPr id="3" name="備忘稿版面配置區 2"/>
+          <p:cNvSpPr>
+            <a:spLocks noGrp="1"/>
+          </p:cNvSpPr>
+          <p:nvPr>
+            <p:ph type="body" idx="1"/>
+          </p:nvPr>
+        </p:nvSpPr>
+        <p:spPr/>
+        <p:txBody>
+          <a:bodyPr/>
+          <a:lstStyle/>
+          <a:p>
+            <a:r>
+              <a:rPr lang="zh-TW" altLang="en-US" dirty="0"/>
+              <a:t>今天來跟大家進行簡單的自我介紹</a:t>
+            </a:r>
+          </a:p>
+        </p:txBody>
+      </p:sp>
+      <p:sp>
+        <p:nvSpPr>
+          <p:cNvPr id="4" name="投影片編號版面配置區 3"/>
+          <p:cNvSpPr>
+            <a:spLocks noGrp="1"/>
+          </p:cNvSpPr>
+          <p:nvPr>
+            <p:ph type="sldNum" sz="quarter" idx="5"/>
+          </p:nvPr>
+        </p:nvSpPr>
+        <p:spPr/>
+        <p:txBody>
+          <a:bodyPr/>
+          <a:lstStyle/>
+          <a:p>
+            <a:fld id="{A8AD5A02-2B1A-49AE-91C3-899D0DA4E90C}" type="slidenum">
+              <a:rPr lang="zh-TW" altLang="en-US" smtClean="0"/>
+              <a:t>1</a:t>
+            </a:fld>
+            <a:endParaRPr lang="zh-TW" altLang="en-US"/>
+          </a:p>
+        </p:txBody>
+      </p:sp>
+    </p:spTree>
+    <p:extLst>
+      <p:ext uri="{BB962C8B-B14F-4D97-AF65-F5344CB8AC3E}">
+        <p14:creationId xmlns:p14="http://schemas.microsoft.com/office/powerpoint/2010/main" val="1522357122"/>
+      </p:ext>
+    </p:extLst>
+  </p:cSld>
+  <p:clrMapOvr>
+    <a:masterClrMapping/>
+  </p:clrMapOvr>
+</p:notes>
+</file>
+
+<file path=ppt/notesSlides/notesSlide2.xml><?xml version="1.0" encoding="utf-8"?>
+<p:notes xmlns:a="http://schemas.openxmlformats.org/drawingml/2006/main" xmlns:r="http://schemas.openxmlformats.org/officeDocument/2006/relationships" xmlns:p="http://schemas.openxmlformats.org/presentationml/2006/main">
+  <p:cSld>
+    <p:spTree>
+      <p:nvGrpSpPr>
+        <p:cNvPr id="1" name=""/>
+        <p:cNvGrpSpPr/>
+        <p:nvPr/>
+      </p:nvGrpSpPr>
+      <p:grpSpPr>
+        <a:xfrm>
+          <a:off x="0" y="0"/>
+          <a:ext cx="0" cy="0"/>
+          <a:chOff x="0" y="0"/>
+          <a:chExt cx="0" cy="0"/>
+        </a:xfrm>
+      </p:grpSpPr>
+      <p:sp>
+        <p:nvSpPr>
+          <p:cNvPr id="2" name="投影片影像版面配置區 1"/>
+          <p:cNvSpPr>
+            <a:spLocks noGrp="1" noRot="1" noChangeAspect="1"/>
+          </p:cNvSpPr>
+          <p:nvPr>
+            <p:ph type="sldImg"/>
+          </p:nvPr>
+        </p:nvSpPr>
+        <p:spPr/>
+      </p:sp>
+      <p:sp>
+        <p:nvSpPr>
+          <p:cNvPr id="3" name="備忘稿版面配置區 2"/>
+          <p:cNvSpPr>
+            <a:spLocks noGrp="1"/>
+          </p:cNvSpPr>
+          <p:nvPr>
+            <p:ph type="body" idx="1"/>
+          </p:nvPr>
+        </p:nvSpPr>
+        <p:spPr/>
+        <p:txBody>
+          <a:bodyPr/>
+          <a:lstStyle/>
+          <a:p>
+            <a:r>
+              <a:rPr lang="zh-TW" altLang="en-US" sz="1800" b="0" i="0" u="none" strike="noStrike" baseline="0" dirty="0">
+                <a:solidFill>
+                  <a:srgbClr val="000000"/>
+                </a:solidFill>
+                <a:latin typeface="標楷體" panose="03000509000000000000" pitchFamily="65" charset="-120"/>
+                <a:ea typeface="標楷體" panose="03000509000000000000" pitchFamily="65" charset="-120"/>
+              </a:rPr>
+              <a:t>哈囉</a:t>
+            </a:r>
+            <a:r>
+              <a:rPr lang="en-US" altLang="zh-TW" sz="1800" b="0" i="0" u="none" strike="noStrike" baseline="0" dirty="0">
+                <a:solidFill>
+                  <a:srgbClr val="000000"/>
+                </a:solidFill>
+                <a:latin typeface="標楷體" panose="03000509000000000000" pitchFamily="65" charset="-120"/>
+                <a:ea typeface="標楷體" panose="03000509000000000000" pitchFamily="65" charset="-120"/>
+              </a:rPr>
+              <a:t>~</a:t>
+            </a:r>
+            <a:r>
+              <a:rPr lang="zh-TW" altLang="en-US" sz="1800" b="0" i="0" u="none" strike="noStrike" baseline="0" dirty="0">
+                <a:solidFill>
+                  <a:srgbClr val="000000"/>
+                </a:solidFill>
+                <a:latin typeface="標楷體" panose="03000509000000000000" pitchFamily="65" charset="-120"/>
+                <a:ea typeface="標楷體" panose="03000509000000000000" pitchFamily="65" charset="-120"/>
+              </a:rPr>
+              <a:t>我是小白，一名立志成為法醫的醫學院學生。我的綽號來自於我一頭白髮。 	</a:t>
+            </a:r>
+          </a:p>
+          <a:p>
+            <a:endParaRPr lang="zh-TW" altLang="en-US" dirty="0"/>
+          </a:p>
+        </p:txBody>
+      </p:sp>
+      <p:sp>
+        <p:nvSpPr>
+          <p:cNvPr id="4" name="投影片編號版面配置區 3"/>
+          <p:cNvSpPr>
+            <a:spLocks noGrp="1"/>
+          </p:cNvSpPr>
+          <p:nvPr>
+            <p:ph type="sldNum" sz="quarter" idx="5"/>
+          </p:nvPr>
+        </p:nvSpPr>
+        <p:spPr/>
+        <p:txBody>
+          <a:bodyPr/>
+          <a:lstStyle/>
+          <a:p>
+            <a:fld id="{A8AD5A02-2B1A-49AE-91C3-899D0DA4E90C}" type="slidenum">
+              <a:rPr lang="zh-TW" altLang="en-US" smtClean="0"/>
+              <a:t>2</a:t>
+            </a:fld>
+            <a:endParaRPr lang="zh-TW" altLang="en-US"/>
+          </a:p>
+        </p:txBody>
+      </p:sp>
+    </p:spTree>
+    <p:extLst>
+      <p:ext uri="{BB962C8B-B14F-4D97-AF65-F5344CB8AC3E}">
+        <p14:creationId xmlns:p14="http://schemas.microsoft.com/office/powerpoint/2010/main" val="2806424183"/>
+      </p:ext>
+    </p:extLst>
+  </p:cSld>
+  <p:clrMapOvr>
+    <a:masterClrMapping/>
+  </p:clrMapOvr>
+</p:notes>
+</file>
+
+<file path=ppt/notesSlides/notesSlide3.xml><?xml version="1.0" encoding="utf-8"?>
+<p:notes xmlns:a="http://schemas.openxmlformats.org/drawingml/2006/main" xmlns:r="http://schemas.openxmlformats.org/officeDocument/2006/relationships" xmlns:p="http://schemas.openxmlformats.org/presentationml/2006/main">
+  <p:cSld>
+    <p:spTree>
+      <p:nvGrpSpPr>
+        <p:cNvPr id="1" name=""/>
+        <p:cNvGrpSpPr/>
+        <p:nvPr/>
+      </p:nvGrpSpPr>
+      <p:grpSpPr>
+        <a:xfrm>
+          <a:off x="0" y="0"/>
+          <a:ext cx="0" cy="0"/>
+          <a:chOff x="0" y="0"/>
+          <a:chExt cx="0" cy="0"/>
+        </a:xfrm>
+      </p:grpSpPr>
+      <p:sp>
+        <p:nvSpPr>
+          <p:cNvPr id="2" name="投影片影像版面配置區 1"/>
+          <p:cNvSpPr>
+            <a:spLocks noGrp="1" noRot="1" noChangeAspect="1"/>
+          </p:cNvSpPr>
+          <p:nvPr>
+            <p:ph type="sldImg"/>
+          </p:nvPr>
+        </p:nvSpPr>
+        <p:spPr/>
+      </p:sp>
+      <p:sp>
+        <p:nvSpPr>
+          <p:cNvPr id="3" name="備忘稿版面配置區 2"/>
+          <p:cNvSpPr>
+            <a:spLocks noGrp="1"/>
+          </p:cNvSpPr>
+          <p:nvPr>
+            <p:ph type="body" idx="1"/>
+          </p:nvPr>
+        </p:nvSpPr>
+        <p:spPr/>
+        <p:txBody>
+          <a:bodyPr/>
+          <a:lstStyle/>
+          <a:p>
+            <a:r>
+              <a:rPr lang="zh-TW" altLang="en-US" sz="1800" b="0" i="0" u="none" strike="noStrike" baseline="0" dirty="0">
+                <a:solidFill>
+                  <a:srgbClr val="000000"/>
+                </a:solidFill>
+                <a:latin typeface="標楷體" panose="03000509000000000000" pitchFamily="65" charset="-120"/>
+                <a:ea typeface="標楷體" panose="03000509000000000000" pitchFamily="65" charset="-120"/>
+              </a:rPr>
+              <a:t>雖然身高不高，常常被同學瞧不起，也沒有人願意和我一起進行實驗，但我從未放棄過我的夢想。 	</a:t>
+            </a:r>
+          </a:p>
+          <a:p>
+            <a:endParaRPr lang="zh-TW" altLang="en-US" dirty="0"/>
+          </a:p>
+        </p:txBody>
+      </p:sp>
+      <p:sp>
+        <p:nvSpPr>
+          <p:cNvPr id="4" name="投影片編號版面配置區 3"/>
+          <p:cNvSpPr>
+            <a:spLocks noGrp="1"/>
+          </p:cNvSpPr>
+          <p:nvPr>
+            <p:ph type="sldNum" sz="quarter" idx="5"/>
+          </p:nvPr>
+        </p:nvSpPr>
+        <p:spPr/>
+        <p:txBody>
+          <a:bodyPr/>
+          <a:lstStyle/>
+          <a:p>
+            <a:fld id="{A8AD5A02-2B1A-49AE-91C3-899D0DA4E90C}" type="slidenum">
+              <a:rPr lang="zh-TW" altLang="en-US" smtClean="0"/>
+              <a:t>3</a:t>
+            </a:fld>
+            <a:endParaRPr lang="zh-TW" altLang="en-US"/>
+          </a:p>
+        </p:txBody>
+      </p:sp>
+    </p:spTree>
+    <p:extLst>
+      <p:ext uri="{BB962C8B-B14F-4D97-AF65-F5344CB8AC3E}">
+        <p14:creationId xmlns:p14="http://schemas.microsoft.com/office/powerpoint/2010/main" val="3389637965"/>
+      </p:ext>
+    </p:extLst>
+  </p:cSld>
+  <p:clrMapOvr>
+    <a:masterClrMapping/>
+  </p:clrMapOvr>
+</p:notes>
+</file>
+
+<file path=ppt/notesSlides/notesSlide4.xml><?xml version="1.0" encoding="utf-8"?>
+<p:notes xmlns:a="http://schemas.openxmlformats.org/drawingml/2006/main" xmlns:r="http://schemas.openxmlformats.org/officeDocument/2006/relationships" xmlns:p="http://schemas.openxmlformats.org/presentationml/2006/main">
+  <p:cSld>
+    <p:spTree>
+      <p:nvGrpSpPr>
+        <p:cNvPr id="1" name=""/>
+        <p:cNvGrpSpPr/>
+        <p:nvPr/>
+      </p:nvGrpSpPr>
+      <p:grpSpPr>
+        <a:xfrm>
+          <a:off x="0" y="0"/>
+          <a:ext cx="0" cy="0"/>
+          <a:chOff x="0" y="0"/>
+          <a:chExt cx="0" cy="0"/>
+        </a:xfrm>
+      </p:grpSpPr>
+      <p:sp>
+        <p:nvSpPr>
+          <p:cNvPr id="2" name="投影片影像版面配置區 1"/>
+          <p:cNvSpPr>
+            <a:spLocks noGrp="1" noRot="1" noChangeAspect="1"/>
+          </p:cNvSpPr>
+          <p:nvPr>
+            <p:ph type="sldImg"/>
+          </p:nvPr>
+        </p:nvSpPr>
+        <p:spPr/>
+      </p:sp>
+      <p:sp>
+        <p:nvSpPr>
+          <p:cNvPr id="3" name="備忘稿版面配置區 2"/>
+          <p:cNvSpPr>
+            <a:spLocks noGrp="1"/>
+          </p:cNvSpPr>
+          <p:nvPr>
+            <p:ph type="body" idx="1"/>
+          </p:nvPr>
+        </p:nvSpPr>
+        <p:spPr/>
+        <p:txBody>
+          <a:bodyPr/>
+          <a:lstStyle/>
+          <a:p>
+            <a:r>
+              <a:rPr lang="zh-TW" altLang="en-US" sz="1800" b="0" i="0" u="none" strike="noStrike" baseline="0" dirty="0">
+                <a:solidFill>
+                  <a:srgbClr val="000000"/>
+                </a:solidFill>
+                <a:latin typeface="標楷體" panose="03000509000000000000" pitchFamily="65" charset="-120"/>
+                <a:ea typeface="標楷體" panose="03000509000000000000" pitchFamily="65" charset="-120"/>
+              </a:rPr>
+              <a:t>面對孤獨，我努力自學，研究各種書籍，甚至自己進行實驗。雖然這些努力並不容易，但我始終相信，知識是最強的武器。某天，我在實驗室裡發現了一個關鍵的線索，這個發現讓我倍感振奮。</a:t>
+            </a:r>
+            <a:endParaRPr lang="zh-TW" altLang="en-US" dirty="0"/>
+          </a:p>
+        </p:txBody>
+      </p:sp>
+      <p:sp>
+        <p:nvSpPr>
+          <p:cNvPr id="4" name="投影片編號版面配置區 3"/>
+          <p:cNvSpPr>
+            <a:spLocks noGrp="1"/>
+          </p:cNvSpPr>
+          <p:nvPr>
+            <p:ph type="sldNum" sz="quarter" idx="5"/>
+          </p:nvPr>
+        </p:nvSpPr>
+        <p:spPr/>
+        <p:txBody>
+          <a:bodyPr/>
+          <a:lstStyle/>
+          <a:p>
+            <a:fld id="{A8AD5A02-2B1A-49AE-91C3-899D0DA4E90C}" type="slidenum">
+              <a:rPr lang="zh-TW" altLang="en-US" smtClean="0"/>
+              <a:t>4</a:t>
+            </a:fld>
+            <a:endParaRPr lang="zh-TW" altLang="en-US"/>
+          </a:p>
+        </p:txBody>
+      </p:sp>
+    </p:spTree>
+    <p:extLst>
+      <p:ext uri="{BB962C8B-B14F-4D97-AF65-F5344CB8AC3E}">
+        <p14:creationId xmlns:p14="http://schemas.microsoft.com/office/powerpoint/2010/main" val="3204742282"/>
+      </p:ext>
+    </p:extLst>
+  </p:cSld>
+  <p:clrMapOvr>
+    <a:masterClrMapping/>
+  </p:clrMapOvr>
+</p:notes>
+</file>
+
+<file path=ppt/notesSlides/notesSlide5.xml><?xml version="1.0" encoding="utf-8"?>
+<p:notes xmlns:a="http://schemas.openxmlformats.org/drawingml/2006/main" xmlns:r="http://schemas.openxmlformats.org/officeDocument/2006/relationships" xmlns:p="http://schemas.openxmlformats.org/presentationml/2006/main">
+  <p:cSld>
+    <p:spTree>
+      <p:nvGrpSpPr>
+        <p:cNvPr id="1" name=""/>
+        <p:cNvGrpSpPr/>
+        <p:nvPr/>
+      </p:nvGrpSpPr>
+      <p:grpSpPr>
+        <a:xfrm>
+          <a:off x="0" y="0"/>
+          <a:ext cx="0" cy="0"/>
+          <a:chOff x="0" y="0"/>
+          <a:chExt cx="0" cy="0"/>
+        </a:xfrm>
+      </p:grpSpPr>
+      <p:sp>
+        <p:nvSpPr>
+          <p:cNvPr id="2" name="投影片影像版面配置區 1"/>
+          <p:cNvSpPr>
+            <a:spLocks noGrp="1" noRot="1" noChangeAspect="1"/>
+          </p:cNvSpPr>
+          <p:nvPr>
+            <p:ph type="sldImg"/>
+          </p:nvPr>
+        </p:nvSpPr>
+        <p:spPr/>
+      </p:sp>
+      <p:sp>
+        <p:nvSpPr>
+          <p:cNvPr id="3" name="備忘稿版面配置區 2"/>
+          <p:cNvSpPr>
+            <a:spLocks noGrp="1"/>
+          </p:cNvSpPr>
+          <p:nvPr>
+            <p:ph type="body" idx="1"/>
+          </p:nvPr>
+        </p:nvSpPr>
+        <p:spPr/>
+        <p:txBody>
+          <a:bodyPr/>
+          <a:lstStyle/>
+          <a:p>
+            <a:r>
+              <a:rPr lang="zh-TW" altLang="en-US" sz="1800" b="0" i="0" u="none" strike="noStrike" baseline="0" dirty="0">
+                <a:solidFill>
+                  <a:srgbClr val="000000"/>
+                </a:solidFill>
+                <a:latin typeface="標楷體" panose="03000509000000000000" pitchFamily="65" charset="-120"/>
+                <a:ea typeface="標楷體" panose="03000509000000000000" pitchFamily="65" charset="-120"/>
+              </a:rPr>
+              <a:t>然而，意外發生了</a:t>
+            </a:r>
+            <a:r>
+              <a:rPr lang="en-US" altLang="zh-TW" sz="1800" b="0" i="0" u="none" strike="noStrike" baseline="0" dirty="0">
+                <a:solidFill>
+                  <a:srgbClr val="000000"/>
+                </a:solidFill>
+                <a:latin typeface="標楷體" panose="03000509000000000000" pitchFamily="65" charset="-120"/>
+                <a:ea typeface="標楷體" panose="03000509000000000000" pitchFamily="65" charset="-120"/>
+              </a:rPr>
+              <a:t>——</a:t>
+            </a:r>
+            <a:r>
+              <a:rPr lang="zh-TW" altLang="en-US" sz="1800" b="0" i="0" u="none" strike="noStrike" baseline="0" dirty="0">
+                <a:solidFill>
+                  <a:srgbClr val="000000"/>
+                </a:solidFill>
+                <a:latin typeface="標楷體" panose="03000509000000000000" pitchFamily="65" charset="-120"/>
+                <a:ea typeface="標楷體" panose="03000509000000000000" pitchFamily="65" charset="-120"/>
+              </a:rPr>
+              <a:t>我的實驗器材因故障而損壞，讓我一度絕望。	</a:t>
+            </a:r>
+          </a:p>
+          <a:p>
+            <a:endParaRPr lang="zh-TW" altLang="en-US" dirty="0"/>
+          </a:p>
+        </p:txBody>
+      </p:sp>
+      <p:sp>
+        <p:nvSpPr>
+          <p:cNvPr id="4" name="投影片編號版面配置區 3"/>
+          <p:cNvSpPr>
+            <a:spLocks noGrp="1"/>
+          </p:cNvSpPr>
+          <p:nvPr>
+            <p:ph type="sldNum" sz="quarter" idx="5"/>
+          </p:nvPr>
+        </p:nvSpPr>
+        <p:spPr/>
+        <p:txBody>
+          <a:bodyPr/>
+          <a:lstStyle/>
+          <a:p>
+            <a:fld id="{A8AD5A02-2B1A-49AE-91C3-899D0DA4E90C}" type="slidenum">
+              <a:rPr lang="zh-TW" altLang="en-US" smtClean="0"/>
+              <a:t>5</a:t>
+            </a:fld>
+            <a:endParaRPr lang="zh-TW" altLang="en-US"/>
+          </a:p>
+        </p:txBody>
+      </p:sp>
+    </p:spTree>
+    <p:extLst>
+      <p:ext uri="{BB962C8B-B14F-4D97-AF65-F5344CB8AC3E}">
+        <p14:creationId xmlns:p14="http://schemas.microsoft.com/office/powerpoint/2010/main" val="3098077100"/>
+      </p:ext>
+    </p:extLst>
+  </p:cSld>
+  <p:clrMapOvr>
+    <a:masterClrMapping/>
+  </p:clrMapOvr>
+</p:notes>
+</file>
+
+<file path=ppt/notesSlides/notesSlide6.xml><?xml version="1.0" encoding="utf-8"?>
+<p:notes xmlns:a="http://schemas.openxmlformats.org/drawingml/2006/main" xmlns:r="http://schemas.openxmlformats.org/officeDocument/2006/relationships" xmlns:p="http://schemas.openxmlformats.org/presentationml/2006/main">
+  <p:cSld>
+    <p:spTree>
+      <p:nvGrpSpPr>
+        <p:cNvPr id="1" name=""/>
+        <p:cNvGrpSpPr/>
+        <p:nvPr/>
+      </p:nvGrpSpPr>
+      <p:grpSpPr>
+        <a:xfrm>
+          <a:off x="0" y="0"/>
+          <a:ext cx="0" cy="0"/>
+          <a:chOff x="0" y="0"/>
+          <a:chExt cx="0" cy="0"/>
+        </a:xfrm>
+      </p:grpSpPr>
+      <p:sp>
+        <p:nvSpPr>
+          <p:cNvPr id="2" name="投影片影像版面配置區 1"/>
+          <p:cNvSpPr>
+            <a:spLocks noGrp="1" noRot="1" noChangeAspect="1"/>
+          </p:cNvSpPr>
+          <p:nvPr>
+            <p:ph type="sldImg"/>
+          </p:nvPr>
+        </p:nvSpPr>
+        <p:spPr/>
+      </p:sp>
+      <p:sp>
+        <p:nvSpPr>
+          <p:cNvPr id="3" name="備忘稿版面配置區 2"/>
+          <p:cNvSpPr>
+            <a:spLocks noGrp="1"/>
+          </p:cNvSpPr>
+          <p:nvPr>
+            <p:ph type="body" idx="1"/>
+          </p:nvPr>
+        </p:nvSpPr>
+        <p:spPr/>
+        <p:txBody>
+          <a:bodyPr/>
+          <a:lstStyle/>
+          <a:p>
+            <a:r>
+              <a:rPr lang="zh-TW" altLang="en-US" sz="1800" b="0" i="0" u="none" strike="noStrike" baseline="0" dirty="0">
+                <a:solidFill>
+                  <a:srgbClr val="000000"/>
+                </a:solidFill>
+                <a:latin typeface="標楷體" panose="03000509000000000000" pitchFamily="65" charset="-120"/>
+                <a:ea typeface="標楷體" panose="03000509000000000000" pitchFamily="65" charset="-120"/>
+              </a:rPr>
+              <a:t>就在我考慮放棄的時候，我遇到了一位熱心的教授，他願意指導我，讓我重新燃起了希望。</a:t>
+            </a:r>
+            <a:endParaRPr lang="en-US" altLang="zh-TW" sz="1800" b="0" i="0" u="none" strike="noStrike" baseline="0" dirty="0">
+              <a:solidFill>
+                <a:srgbClr val="000000"/>
+              </a:solidFill>
+              <a:latin typeface="標楷體" panose="03000509000000000000" pitchFamily="65" charset="-120"/>
+              <a:ea typeface="標楷體" panose="03000509000000000000" pitchFamily="65" charset="-120"/>
+            </a:endParaRPr>
+          </a:p>
+          <a:p>
+            <a:pPr algn="l"/>
+            <a:r>
+              <a:rPr lang="zh-TW" altLang="en-US" sz="1800" b="0" i="0" u="none" strike="noStrike" baseline="0" dirty="0">
+                <a:solidFill>
+                  <a:srgbClr val="000000"/>
+                </a:solidFill>
+                <a:latin typeface="標楷體" panose="03000509000000000000" pitchFamily="65" charset="-120"/>
+                <a:ea typeface="標楷體" panose="03000509000000000000" pitchFamily="65" charset="-120"/>
+              </a:rPr>
+              <a:t>透過他的幫助，我不僅修復了實驗器材，還將我的研究推向新的高峰。 	</a:t>
+            </a:r>
+          </a:p>
+          <a:p>
+            <a:endParaRPr lang="zh-TW" altLang="en-US" sz="1800" b="0" i="0" u="none" strike="noStrike" baseline="0" dirty="0">
+              <a:solidFill>
+                <a:srgbClr val="000000"/>
+              </a:solidFill>
+              <a:latin typeface="標楷體" panose="03000509000000000000" pitchFamily="65" charset="-120"/>
+              <a:ea typeface="標楷體" panose="03000509000000000000" pitchFamily="65" charset="-120"/>
+            </a:endParaRPr>
+          </a:p>
+          <a:p>
+            <a:endParaRPr lang="zh-TW" altLang="en-US" dirty="0"/>
+          </a:p>
+        </p:txBody>
+      </p:sp>
+      <p:sp>
+        <p:nvSpPr>
+          <p:cNvPr id="4" name="投影片編號版面配置區 3"/>
+          <p:cNvSpPr>
+            <a:spLocks noGrp="1"/>
+          </p:cNvSpPr>
+          <p:nvPr>
+            <p:ph type="sldNum" sz="quarter" idx="5"/>
+          </p:nvPr>
+        </p:nvSpPr>
+        <p:spPr/>
+        <p:txBody>
+          <a:bodyPr/>
+          <a:lstStyle/>
+          <a:p>
+            <a:fld id="{A8AD5A02-2B1A-49AE-91C3-899D0DA4E90C}" type="slidenum">
+              <a:rPr lang="zh-TW" altLang="en-US" smtClean="0"/>
+              <a:t>6</a:t>
+            </a:fld>
+            <a:endParaRPr lang="zh-TW" altLang="en-US"/>
+          </a:p>
+        </p:txBody>
+      </p:sp>
+    </p:spTree>
+    <p:extLst>
+      <p:ext uri="{BB962C8B-B14F-4D97-AF65-F5344CB8AC3E}">
+        <p14:creationId xmlns:p14="http://schemas.microsoft.com/office/powerpoint/2010/main" val="2736129165"/>
+      </p:ext>
+    </p:extLst>
+  </p:cSld>
+  <p:clrMapOvr>
+    <a:masterClrMapping/>
+  </p:clrMapOvr>
+</p:notes>
+</file>
+
+<file path=ppt/notesSlides/notesSlide7.xml><?xml version="1.0" encoding="utf-8"?>
+<p:notes xmlns:a="http://schemas.openxmlformats.org/drawingml/2006/main" xmlns:r="http://schemas.openxmlformats.org/officeDocument/2006/relationships" xmlns:p="http://schemas.openxmlformats.org/presentationml/2006/main">
+  <p:cSld>
+    <p:spTree>
+      <p:nvGrpSpPr>
+        <p:cNvPr id="1" name=""/>
+        <p:cNvGrpSpPr/>
+        <p:nvPr/>
+      </p:nvGrpSpPr>
+      <p:grpSpPr>
+        <a:xfrm>
+          <a:off x="0" y="0"/>
+          <a:ext cx="0" cy="0"/>
+          <a:chOff x="0" y="0"/>
+          <a:chExt cx="0" cy="0"/>
+        </a:xfrm>
+      </p:grpSpPr>
+      <p:sp>
+        <p:nvSpPr>
+          <p:cNvPr id="2" name="投影片影像版面配置區 1"/>
+          <p:cNvSpPr>
+            <a:spLocks noGrp="1" noRot="1" noChangeAspect="1"/>
+          </p:cNvSpPr>
+          <p:nvPr>
+            <p:ph type="sldImg"/>
+          </p:nvPr>
+        </p:nvSpPr>
+        <p:spPr/>
+      </p:sp>
+      <p:sp>
+        <p:nvSpPr>
+          <p:cNvPr id="3" name="備忘稿版面配置區 2"/>
+          <p:cNvSpPr>
+            <a:spLocks noGrp="1"/>
+          </p:cNvSpPr>
+          <p:nvPr>
+            <p:ph type="body" idx="1"/>
+          </p:nvPr>
+        </p:nvSpPr>
+        <p:spPr/>
+        <p:txBody>
+          <a:bodyPr/>
+          <a:lstStyle/>
+          <a:p>
+            <a:pPr marL="0" marR="0" lvl="0" indent="0" algn="l" defTabSz="914400" rtl="0" eaLnBrk="1" fontAlgn="auto" latinLnBrk="0" hangingPunct="1">
+              <a:lnSpc>
+                <a:spcPct val="100000"/>
+              </a:lnSpc>
+              <a:spcBef>
+                <a:spcPts val="0"/>
+              </a:spcBef>
+              <a:spcAft>
+                <a:spcPts val="0"/>
+              </a:spcAft>
+              <a:buClrTx/>
+              <a:buSzTx/>
+              <a:buFontTx/>
+              <a:buNone/>
+              <a:tabLst/>
+              <a:defRPr/>
+            </a:pPr>
+            <a:r>
+              <a:rPr lang="zh-TW" altLang="en-US" sz="1800" b="0" i="0" u="none" strike="noStrike" baseline="0" dirty="0">
+                <a:solidFill>
+                  <a:srgbClr val="000000"/>
+                </a:solidFill>
+                <a:latin typeface="標楷體" panose="03000509000000000000" pitchFamily="65" charset="-120"/>
+                <a:ea typeface="標楷體" panose="03000509000000000000" pitchFamily="65" charset="-120"/>
+              </a:rPr>
+              <a:t>最終，我成功地完成了一個重要的法醫案例，得到了同學們的認可。這讓我意識到，堅持和努力總會帶來意想不到的轉機。 	</a:t>
+            </a:r>
+          </a:p>
+        </p:txBody>
+      </p:sp>
+      <p:sp>
+        <p:nvSpPr>
+          <p:cNvPr id="4" name="投影片編號版面配置區 3"/>
+          <p:cNvSpPr>
+            <a:spLocks noGrp="1"/>
+          </p:cNvSpPr>
+          <p:nvPr>
+            <p:ph type="sldNum" sz="quarter" idx="5"/>
+          </p:nvPr>
+        </p:nvSpPr>
+        <p:spPr/>
+        <p:txBody>
+          <a:bodyPr/>
+          <a:lstStyle/>
+          <a:p>
+            <a:fld id="{A8AD5A02-2B1A-49AE-91C3-899D0DA4E90C}" type="slidenum">
+              <a:rPr lang="zh-TW" altLang="en-US" smtClean="0"/>
+              <a:t>7</a:t>
+            </a:fld>
+            <a:endParaRPr lang="zh-TW" altLang="en-US"/>
+          </a:p>
+        </p:txBody>
+      </p:sp>
+    </p:spTree>
+    <p:extLst>
+      <p:ext uri="{BB962C8B-B14F-4D97-AF65-F5344CB8AC3E}">
+        <p14:creationId xmlns:p14="http://schemas.microsoft.com/office/powerpoint/2010/main" val="1572455649"/>
+      </p:ext>
+    </p:extLst>
+  </p:cSld>
+  <p:clrMapOvr>
+    <a:masterClrMapping/>
+  </p:clrMapOvr>
+</p:notes>
+</file>
+
+<file path=ppt/notesSlides/notesSlide8.xml><?xml version="1.0" encoding="utf-8"?>
+<p:notes xmlns:a="http://schemas.openxmlformats.org/drawingml/2006/main" xmlns:r="http://schemas.openxmlformats.org/officeDocument/2006/relationships" xmlns:p="http://schemas.openxmlformats.org/presentationml/2006/main">
+  <p:cSld>
+    <p:spTree>
+      <p:nvGrpSpPr>
+        <p:cNvPr id="1" name=""/>
+        <p:cNvGrpSpPr/>
+        <p:nvPr/>
+      </p:nvGrpSpPr>
+      <p:grpSpPr>
+        <a:xfrm>
+          <a:off x="0" y="0"/>
+          <a:ext cx="0" cy="0"/>
+          <a:chOff x="0" y="0"/>
+          <a:chExt cx="0" cy="0"/>
+        </a:xfrm>
+      </p:grpSpPr>
+      <p:sp>
+        <p:nvSpPr>
+          <p:cNvPr id="2" name="投影片影像版面配置區 1"/>
+          <p:cNvSpPr>
+            <a:spLocks noGrp="1" noRot="1" noChangeAspect="1"/>
+          </p:cNvSpPr>
+          <p:nvPr>
+            <p:ph type="sldImg"/>
+          </p:nvPr>
+        </p:nvSpPr>
+        <p:spPr/>
+      </p:sp>
+      <p:sp>
+        <p:nvSpPr>
+          <p:cNvPr id="3" name="備忘稿版面配置區 2"/>
+          <p:cNvSpPr>
+            <a:spLocks noGrp="1"/>
+          </p:cNvSpPr>
+          <p:nvPr>
+            <p:ph type="body" idx="1"/>
+          </p:nvPr>
+        </p:nvSpPr>
+        <p:spPr/>
+        <p:txBody>
+          <a:bodyPr/>
+          <a:lstStyle/>
+          <a:p>
+            <a:r>
+              <a:rPr lang="zh-TW" altLang="en-US" dirty="0"/>
+              <a:t>現在，我的夢想依然在路上，未來還有更多的挑戰等著我，但我相信，勇敢追尋才能創造自己的故事。</a:t>
+            </a:r>
+          </a:p>
+        </p:txBody>
+      </p:sp>
+      <p:sp>
+        <p:nvSpPr>
+          <p:cNvPr id="4" name="投影片編號版面配置區 3"/>
+          <p:cNvSpPr>
+            <a:spLocks noGrp="1"/>
+          </p:cNvSpPr>
+          <p:nvPr>
+            <p:ph type="sldNum" sz="quarter" idx="5"/>
+          </p:nvPr>
+        </p:nvSpPr>
+        <p:spPr/>
+        <p:txBody>
+          <a:bodyPr/>
+          <a:lstStyle/>
+          <a:p>
+            <a:fld id="{A8AD5A02-2B1A-49AE-91C3-899D0DA4E90C}" type="slidenum">
+              <a:rPr lang="zh-TW" altLang="en-US" smtClean="0"/>
+              <a:t>8</a:t>
+            </a:fld>
+            <a:endParaRPr lang="zh-TW" altLang="en-US"/>
+          </a:p>
+        </p:txBody>
+      </p:sp>
+    </p:spTree>
+    <p:extLst>
+      <p:ext uri="{BB962C8B-B14F-4D97-AF65-F5344CB8AC3E}">
+        <p14:creationId xmlns:p14="http://schemas.microsoft.com/office/powerpoint/2010/main" val="663645191"/>
+      </p:ext>
+    </p:extLst>
+  </p:cSld>
+  <p:clrMapOvr>
+    <a:masterClrMapping/>
+  </p:clrMapOvr>
+</p:notes>
 </file>
 
 <file path=ppt/slideLayouts/slideLayout1.xml><?xml version="1.0" encoding="utf-8"?>
@@ -3348,7 +4531,7 @@
           <p:nvPr/>
         </p:nvPicPr>
         <p:blipFill>
-          <a:blip r:embed="rId2"/>
+          <a:blip r:embed="rId3"/>
           <a:srcRect l="890" t="1941" b="1941"/>
           <a:stretch/>
         </p:blipFill>
@@ -3429,13 +4612,13 @@
   <p:clrMapOvr>
     <a:masterClrMapping/>
   </p:clrMapOvr>
-  <mc:AlternateContent xmlns:mc="http://schemas.openxmlformats.org/markup-compatibility/2006">
-    <mc:Choice xmlns:p159="http://schemas.microsoft.com/office/powerpoint/2015/09/main" Requires="p159">
+  <mc:AlternateContent xmlns:mc="http://schemas.openxmlformats.org/markup-compatibility/2006" xmlns:p159="http://schemas.microsoft.com/office/powerpoint/2015/09/main">
+    <mc:Choice Requires="p159">
       <p:transition xmlns:p14="http://schemas.microsoft.com/office/powerpoint/2010/main" spd="slow" p14:dur="2000">
         <p159:morph option="byObject"/>
       </p:transition>
     </mc:Choice>
-    <mc:Fallback>
+    <mc:Fallback xmlns="">
       <p:transition spd="slow">
         <p:fade/>
       </p:transition>
@@ -3476,7 +4659,7 @@
           <p:nvPr/>
         </p:nvPicPr>
         <p:blipFill>
-          <a:blip r:embed="rId2"/>
+          <a:blip r:embed="rId3"/>
           <a:srcRect l="890" t="1941" b="1941"/>
           <a:stretch/>
         </p:blipFill>
@@ -3505,7 +4688,7 @@
           <p:nvPr/>
         </p:nvPicPr>
         <p:blipFill>
-          <a:blip r:embed="rId3" cstate="print">
+          <a:blip r:embed="rId4" cstate="print">
             <a:extLst>
               <a:ext uri="{28A0092B-C50C-407E-A947-70E740481C1C}">
                 <a14:useLocalDpi xmlns:a14="http://schemas.microsoft.com/office/drawing/2010/main" val="0"/>
@@ -3602,13 +4785,13 @@
   <p:clrMapOvr>
     <a:masterClrMapping/>
   </p:clrMapOvr>
-  <mc:AlternateContent xmlns:mc="http://schemas.openxmlformats.org/markup-compatibility/2006">
-    <mc:Choice xmlns:p159="http://schemas.microsoft.com/office/powerpoint/2015/09/main" Requires="p159">
+  <mc:AlternateContent xmlns:mc="http://schemas.openxmlformats.org/markup-compatibility/2006" xmlns:p159="http://schemas.microsoft.com/office/powerpoint/2015/09/main">
+    <mc:Choice Requires="p159">
       <p:transition xmlns:p14="http://schemas.microsoft.com/office/powerpoint/2010/main" spd="slow" p14:dur="2000">
         <p159:morph option="byObject"/>
       </p:transition>
     </mc:Choice>
-    <mc:Fallback>
+    <mc:Fallback xmlns="">
       <p:transition spd="slow">
         <p:fade/>
       </p:transition>
@@ -3649,7 +4832,7 @@
           <p:nvPr/>
         </p:nvPicPr>
         <p:blipFill>
-          <a:blip r:embed="rId2"/>
+          <a:blip r:embed="rId3"/>
           <a:srcRect l="890" t="1941" b="1941"/>
           <a:stretch/>
         </p:blipFill>
@@ -3678,7 +4861,7 @@
           <p:nvPr/>
         </p:nvPicPr>
         <p:blipFill>
-          <a:blip r:embed="rId3" cstate="print">
+          <a:blip r:embed="rId4" cstate="print">
             <a:extLst>
               <a:ext uri="{28A0092B-C50C-407E-A947-70E740481C1C}">
                 <a14:useLocalDpi xmlns:a14="http://schemas.microsoft.com/office/drawing/2010/main" val="0"/>
@@ -3775,13 +4958,13 @@
   <p:clrMapOvr>
     <a:masterClrMapping/>
   </p:clrMapOvr>
-  <mc:AlternateContent xmlns:mc="http://schemas.openxmlformats.org/markup-compatibility/2006">
-    <mc:Choice xmlns:p159="http://schemas.microsoft.com/office/powerpoint/2015/09/main" Requires="p159">
+  <mc:AlternateContent xmlns:mc="http://schemas.openxmlformats.org/markup-compatibility/2006" xmlns:p159="http://schemas.microsoft.com/office/powerpoint/2015/09/main">
+    <mc:Choice Requires="p159">
       <p:transition xmlns:p14="http://schemas.microsoft.com/office/powerpoint/2010/main" spd="slow" p14:dur="2000">
         <p159:morph option="byObject"/>
       </p:transition>
     </mc:Choice>
-    <mc:Fallback>
+    <mc:Fallback xmlns="">
       <p:transition spd="slow">
         <p:fade/>
       </p:transition>
@@ -3822,7 +5005,7 @@
           <p:nvPr/>
         </p:nvPicPr>
         <p:blipFill>
-          <a:blip r:embed="rId2"/>
+          <a:blip r:embed="rId3"/>
           <a:srcRect l="890" t="1941" b="1941"/>
           <a:stretch/>
         </p:blipFill>
@@ -3851,7 +5034,7 @@
           <p:nvPr/>
         </p:nvPicPr>
         <p:blipFill>
-          <a:blip r:embed="rId3" cstate="print">
+          <a:blip r:embed="rId4" cstate="print">
             <a:extLst>
               <a:ext uri="{28A0092B-C50C-407E-A947-70E740481C1C}">
                 <a14:useLocalDpi xmlns:a14="http://schemas.microsoft.com/office/drawing/2010/main" val="0"/>
@@ -3948,13 +5131,13 @@
   <p:clrMapOvr>
     <a:masterClrMapping/>
   </p:clrMapOvr>
-  <mc:AlternateContent xmlns:mc="http://schemas.openxmlformats.org/markup-compatibility/2006">
-    <mc:Choice xmlns:p159="http://schemas.microsoft.com/office/powerpoint/2015/09/main" Requires="p159">
+  <mc:AlternateContent xmlns:mc="http://schemas.openxmlformats.org/markup-compatibility/2006" xmlns:p159="http://schemas.microsoft.com/office/powerpoint/2015/09/main">
+    <mc:Choice Requires="p159">
       <p:transition xmlns:p14="http://schemas.microsoft.com/office/powerpoint/2010/main" spd="slow" p14:dur="2000">
         <p159:morph option="byObject"/>
       </p:transition>
     </mc:Choice>
-    <mc:Fallback>
+    <mc:Fallback xmlns="">
       <p:transition spd="slow">
         <p:fade/>
       </p:transition>
@@ -3995,7 +5178,7 @@
           <p:nvPr/>
         </p:nvPicPr>
         <p:blipFill>
-          <a:blip r:embed="rId2"/>
+          <a:blip r:embed="rId3"/>
           <a:srcRect l="890" t="1941" b="1941"/>
           <a:stretch/>
         </p:blipFill>
@@ -4024,7 +5207,7 @@
           <p:nvPr/>
         </p:nvPicPr>
         <p:blipFill>
-          <a:blip r:embed="rId3" cstate="print">
+          <a:blip r:embed="rId4" cstate="print">
             <a:extLst>
               <a:ext uri="{28A0092B-C50C-407E-A947-70E740481C1C}">
                 <a14:useLocalDpi xmlns:a14="http://schemas.microsoft.com/office/drawing/2010/main" val="0"/>
@@ -4121,13 +5304,13 @@
   <p:clrMapOvr>
     <a:masterClrMapping/>
   </p:clrMapOvr>
-  <mc:AlternateContent xmlns:mc="http://schemas.openxmlformats.org/markup-compatibility/2006">
-    <mc:Choice xmlns:p159="http://schemas.microsoft.com/office/powerpoint/2015/09/main" Requires="p159">
+  <mc:AlternateContent xmlns:mc="http://schemas.openxmlformats.org/markup-compatibility/2006" xmlns:p159="http://schemas.microsoft.com/office/powerpoint/2015/09/main">
+    <mc:Choice Requires="p159">
       <p:transition xmlns:p14="http://schemas.microsoft.com/office/powerpoint/2010/main" spd="slow" p14:dur="2000">
         <p159:morph option="byObject"/>
       </p:transition>
     </mc:Choice>
-    <mc:Fallback>
+    <mc:Fallback xmlns="">
       <p:transition spd="slow">
         <p:fade/>
       </p:transition>
@@ -4168,7 +5351,7 @@
           <p:nvPr/>
         </p:nvPicPr>
         <p:blipFill>
-          <a:blip r:embed="rId2"/>
+          <a:blip r:embed="rId3"/>
           <a:srcRect l="890" t="1941" b="1941"/>
           <a:stretch/>
         </p:blipFill>
@@ -4197,7 +5380,7 @@
           <p:nvPr/>
         </p:nvPicPr>
         <p:blipFill>
-          <a:blip r:embed="rId3" cstate="print">
+          <a:blip r:embed="rId4" cstate="print">
             <a:extLst>
               <a:ext uri="{28A0092B-C50C-407E-A947-70E740481C1C}">
                 <a14:useLocalDpi xmlns:a14="http://schemas.microsoft.com/office/drawing/2010/main" val="0"/>
@@ -4294,13 +5477,13 @@
   <p:clrMapOvr>
     <a:masterClrMapping/>
   </p:clrMapOvr>
-  <mc:AlternateContent xmlns:mc="http://schemas.openxmlformats.org/markup-compatibility/2006">
-    <mc:Choice xmlns:p159="http://schemas.microsoft.com/office/powerpoint/2015/09/main" Requires="p159">
+  <mc:AlternateContent xmlns:mc="http://schemas.openxmlformats.org/markup-compatibility/2006" xmlns:p159="http://schemas.microsoft.com/office/powerpoint/2015/09/main">
+    <mc:Choice Requires="p159">
       <p:transition xmlns:p14="http://schemas.microsoft.com/office/powerpoint/2010/main" spd="slow" p14:dur="2000">
         <p159:morph option="byObject"/>
       </p:transition>
     </mc:Choice>
-    <mc:Fallback>
+    <mc:Fallback xmlns="">
       <p:transition spd="slow">
         <p:fade/>
       </p:transition>
@@ -4341,7 +5524,7 @@
           <p:nvPr/>
         </p:nvPicPr>
         <p:blipFill>
-          <a:blip r:embed="rId2"/>
+          <a:blip r:embed="rId3"/>
           <a:srcRect l="890" t="1941" b="1941"/>
           <a:stretch/>
         </p:blipFill>
@@ -4370,7 +5553,7 @@
           <p:nvPr/>
         </p:nvPicPr>
         <p:blipFill>
-          <a:blip r:embed="rId3" cstate="print">
+          <a:blip r:embed="rId4" cstate="print">
             <a:extLst>
               <a:ext uri="{28A0092B-C50C-407E-A947-70E740481C1C}">
                 <a14:useLocalDpi xmlns:a14="http://schemas.microsoft.com/office/drawing/2010/main" val="0"/>
@@ -4467,13 +5650,13 @@
   <p:clrMapOvr>
     <a:masterClrMapping/>
   </p:clrMapOvr>
-  <mc:AlternateContent xmlns:mc="http://schemas.openxmlformats.org/markup-compatibility/2006">
-    <mc:Choice xmlns:p159="http://schemas.microsoft.com/office/powerpoint/2015/09/main" Requires="p159">
+  <mc:AlternateContent xmlns:mc="http://schemas.openxmlformats.org/markup-compatibility/2006" xmlns:p159="http://schemas.microsoft.com/office/powerpoint/2015/09/main">
+    <mc:Choice Requires="p159">
       <p:transition xmlns:p14="http://schemas.microsoft.com/office/powerpoint/2010/main" spd="slow" p14:dur="2000">
         <p159:morph option="byObject"/>
       </p:transition>
     </mc:Choice>
-    <mc:Fallback>
+    <mc:Fallback xmlns="">
       <p:transition spd="slow">
         <p:fade/>
       </p:transition>
@@ -4514,7 +5697,7 @@
           <p:nvPr/>
         </p:nvPicPr>
         <p:blipFill>
-          <a:blip r:embed="rId2"/>
+          <a:blip r:embed="rId3"/>
           <a:srcRect l="890" t="1941" b="1941"/>
           <a:stretch/>
         </p:blipFill>
@@ -4543,7 +5726,7 @@
           <p:nvPr/>
         </p:nvPicPr>
         <p:blipFill>
-          <a:blip r:embed="rId3" cstate="print">
+          <a:blip r:embed="rId4" cstate="print">
             <a:extLst>
               <a:ext uri="{28A0092B-C50C-407E-A947-70E740481C1C}">
                 <a14:useLocalDpi xmlns:a14="http://schemas.microsoft.com/office/drawing/2010/main" val="0"/>
@@ -4640,13 +5823,13 @@
   <p:clrMapOvr>
     <a:masterClrMapping/>
   </p:clrMapOvr>
-  <mc:AlternateContent xmlns:mc="http://schemas.openxmlformats.org/markup-compatibility/2006">
-    <mc:Choice xmlns:p159="http://schemas.microsoft.com/office/powerpoint/2015/09/main" Requires="p159">
+  <mc:AlternateContent xmlns:mc="http://schemas.openxmlformats.org/markup-compatibility/2006" xmlns:p159="http://schemas.microsoft.com/office/powerpoint/2015/09/main">
+    <mc:Choice Requires="p159">
       <p:transition xmlns:p14="http://schemas.microsoft.com/office/powerpoint/2010/main" spd="slow" p14:dur="2000">
         <p159:morph option="byObject"/>
       </p:transition>
     </mc:Choice>
-    <mc:Fallback>
+    <mc:Fallback xmlns="">
       <p:transition spd="slow">
         <p:fade/>
       </p:transition>
@@ -4948,4 +6131,319 @@
     </a:ext>
   </a:extLst>
 </a:theme>
+</file>
+
+<file path=ppt/theme/theme2.xml><?xml version="1.0" encoding="utf-8"?>
+<a:theme xmlns:a="http://schemas.openxmlformats.org/drawingml/2006/main" name="Office 佈景主題">
+  <a:themeElements>
+    <a:clrScheme name="Office">
+      <a:dk1>
+        <a:sysClr val="windowText" lastClr="000000"/>
+      </a:dk1>
+      <a:lt1>
+        <a:sysClr val="window" lastClr="FFFFFF"/>
+      </a:lt1>
+      <a:dk2>
+        <a:srgbClr val="0E2841"/>
+      </a:dk2>
+      <a:lt2>
+        <a:srgbClr val="E8E8E8"/>
+      </a:lt2>
+      <a:accent1>
+        <a:srgbClr val="156082"/>
+      </a:accent1>
+      <a:accent2>
+        <a:srgbClr val="E97132"/>
+      </a:accent2>
+      <a:accent3>
+        <a:srgbClr val="196B24"/>
+      </a:accent3>
+      <a:accent4>
+        <a:srgbClr val="0F9ED5"/>
+      </a:accent4>
+      <a:accent5>
+        <a:srgbClr val="A02B93"/>
+      </a:accent5>
+      <a:accent6>
+        <a:srgbClr val="4EA72E"/>
+      </a:accent6>
+      <a:hlink>
+        <a:srgbClr val="467886"/>
+      </a:hlink>
+      <a:folHlink>
+        <a:srgbClr val="96607D"/>
+      </a:folHlink>
+    </a:clrScheme>
+    <a:fontScheme name="Office">
+      <a:majorFont>
+        <a:latin typeface="Aptos Display" panose="02110004020202020204"/>
+        <a:ea typeface=""/>
+        <a:cs typeface=""/>
+        <a:font script="Jpan" typeface="游ゴシック Light"/>
+        <a:font script="Hang" typeface="맑은 고딕"/>
+        <a:font script="Hans" typeface="等线 Light"/>
+        <a:font script="Hant" typeface="新細明體"/>
+        <a:font script="Arab" typeface="Times New Roman"/>
+        <a:font script="Hebr" typeface="Times New Roman"/>
+        <a:font script="Thai" typeface="Angsana New"/>
+        <a:font script="Ethi" typeface="Nyala"/>
+        <a:font script="Beng" typeface="Vrinda"/>
+        <a:font script="Gujr" typeface="Shruti"/>
+        <a:font script="Khmr" typeface="MoolBoran"/>
+        <a:font script="Knda" typeface="Tunga"/>
+        <a:font script="Guru" typeface="Raavi"/>
+        <a:font script="Cans" typeface="Euphemia"/>
+        <a:font script="Cher" typeface="Plantagenet Cherokee"/>
+        <a:font script="Yiii" typeface="Microsoft Yi Baiti"/>
+        <a:font script="Tibt" typeface="Microsoft Himalaya"/>
+        <a:font script="Thaa" typeface="MV Boli"/>
+        <a:font script="Deva" typeface="Mangal"/>
+        <a:font script="Telu" typeface="Gautami"/>
+        <a:font script="Taml" typeface="Latha"/>
+        <a:font script="Syrc" typeface="Estrangelo Edessa"/>
+        <a:font script="Orya" typeface="Kalinga"/>
+        <a:font script="Mlym" typeface="Kartika"/>
+        <a:font script="Laoo" typeface="DokChampa"/>
+        <a:font script="Sinh" typeface="Iskoola Pota"/>
+        <a:font script="Mong" typeface="Mongolian Baiti"/>
+        <a:font script="Viet" typeface="Times New Roman"/>
+        <a:font script="Uigh" typeface="Microsoft Uighur"/>
+        <a:font script="Geor" typeface="Sylfaen"/>
+        <a:font script="Armn" typeface="Arial"/>
+        <a:font script="Bugi" typeface="Leelawadee UI"/>
+        <a:font script="Bopo" typeface="Microsoft JhengHei"/>
+        <a:font script="Java" typeface="Javanese Text"/>
+        <a:font script="Lisu" typeface="Segoe UI"/>
+        <a:font script="Mymr" typeface="Myanmar Text"/>
+        <a:font script="Nkoo" typeface="Ebrima"/>
+        <a:font script="Olck" typeface="Nirmala UI"/>
+        <a:font script="Osma" typeface="Ebrima"/>
+        <a:font script="Phag" typeface="Phagspa"/>
+        <a:font script="Syrn" typeface="Estrangelo Edessa"/>
+        <a:font script="Syrj" typeface="Estrangelo Edessa"/>
+        <a:font script="Syre" typeface="Estrangelo Edessa"/>
+        <a:font script="Sora" typeface="Nirmala UI"/>
+        <a:font script="Tale" typeface="Microsoft Tai Le"/>
+        <a:font script="Talu" typeface="Microsoft New Tai Lue"/>
+        <a:font script="Tfng" typeface="Ebrima"/>
+      </a:majorFont>
+      <a:minorFont>
+        <a:latin typeface="Aptos" panose="02110004020202020204"/>
+        <a:ea typeface=""/>
+        <a:cs typeface=""/>
+        <a:font script="Jpan" typeface="游ゴシック"/>
+        <a:font script="Hang" typeface="맑은 고딕"/>
+        <a:font script="Hans" typeface="等线"/>
+        <a:font script="Hant" typeface="新細明體"/>
+        <a:font script="Arab" typeface="Arial"/>
+        <a:font script="Hebr" typeface="Arial"/>
+        <a:font script="Thai" typeface="Cordia New"/>
+        <a:font script="Ethi" typeface="Nyala"/>
+        <a:font script="Beng" typeface="Vrinda"/>
+        <a:font script="Gujr" typeface="Shruti"/>
+        <a:font script="Khmr" typeface="DaunPenh"/>
+        <a:font script="Knda" typeface="Tunga"/>
+        <a:font script="Guru" typeface="Raavi"/>
+        <a:font script="Cans" typeface="Euphemia"/>
+        <a:font script="Cher" typeface="Plantagenet Cherokee"/>
+        <a:font script="Yiii" typeface="Microsoft Yi Baiti"/>
+        <a:font script="Tibt" typeface="Microsoft Himalaya"/>
+        <a:font script="Thaa" typeface="MV Boli"/>
+        <a:font script="Deva" typeface="Mangal"/>
+        <a:font script="Telu" typeface="Gautami"/>
+        <a:font script="Taml" typeface="Latha"/>
+        <a:font script="Syrc" typeface="Estrangelo Edessa"/>
+        <a:font script="Orya" typeface="Kalinga"/>
+        <a:font script="Mlym" typeface="Kartika"/>
+        <a:font script="Laoo" typeface="DokChampa"/>
+        <a:font script="Sinh" typeface="Iskoola Pota"/>
+        <a:font script="Mong" typeface="Mongolian Baiti"/>
+        <a:font script="Viet" typeface="Arial"/>
+        <a:font script="Uigh" typeface="Microsoft Uighur"/>
+        <a:font script="Geor" typeface="Sylfaen"/>
+        <a:font script="Armn" typeface="Arial"/>
+        <a:font script="Bugi" typeface="Leelawadee UI"/>
+        <a:font script="Bopo" typeface="Microsoft JhengHei"/>
+        <a:font script="Java" typeface="Javanese Text"/>
+        <a:font script="Lisu" typeface="Segoe UI"/>
+        <a:font script="Mymr" typeface="Myanmar Text"/>
+        <a:font script="Nkoo" typeface="Ebrima"/>
+        <a:font script="Olck" typeface="Nirmala UI"/>
+        <a:font script="Osma" typeface="Ebrima"/>
+        <a:font script="Phag" typeface="Phagspa"/>
+        <a:font script="Syrn" typeface="Estrangelo Edessa"/>
+        <a:font script="Syrj" typeface="Estrangelo Edessa"/>
+        <a:font script="Syre" typeface="Estrangelo Edessa"/>
+        <a:font script="Sora" typeface="Nirmala UI"/>
+        <a:font script="Tale" typeface="Microsoft Tai Le"/>
+        <a:font script="Talu" typeface="Microsoft New Tai Lue"/>
+        <a:font script="Tfng" typeface="Ebrima"/>
+      </a:minorFont>
+    </a:fontScheme>
+    <a:fmtScheme name="Office">
+      <a:fillStyleLst>
+        <a:solidFill>
+          <a:schemeClr val="phClr"/>
+        </a:solidFill>
+        <a:gradFill rotWithShape="1">
+          <a:gsLst>
+            <a:gs pos="0">
+              <a:schemeClr val="phClr">
+                <a:lumMod val="110000"/>
+                <a:satMod val="105000"/>
+                <a:tint val="67000"/>
+              </a:schemeClr>
+            </a:gs>
+            <a:gs pos="50000">
+              <a:schemeClr val="phClr">
+                <a:lumMod val="105000"/>
+                <a:satMod val="103000"/>
+                <a:tint val="73000"/>
+              </a:schemeClr>
+            </a:gs>
+            <a:gs pos="100000">
+              <a:schemeClr val="phClr">
+                <a:lumMod val="105000"/>
+                <a:satMod val="109000"/>
+                <a:tint val="81000"/>
+              </a:schemeClr>
+            </a:gs>
+          </a:gsLst>
+          <a:lin ang="5400000" scaled="0"/>
+        </a:gradFill>
+        <a:gradFill rotWithShape="1">
+          <a:gsLst>
+            <a:gs pos="0">
+              <a:schemeClr val="phClr">
+                <a:satMod val="103000"/>
+                <a:lumMod val="102000"/>
+                <a:tint val="94000"/>
+              </a:schemeClr>
+            </a:gs>
+            <a:gs pos="50000">
+              <a:schemeClr val="phClr">
+                <a:satMod val="110000"/>
+                <a:lumMod val="100000"/>
+                <a:shade val="100000"/>
+              </a:schemeClr>
+            </a:gs>
+            <a:gs pos="100000">
+              <a:schemeClr val="phClr">
+                <a:lumMod val="99000"/>
+                <a:satMod val="120000"/>
+                <a:shade val="78000"/>
+              </a:schemeClr>
+            </a:gs>
+          </a:gsLst>
+          <a:lin ang="5400000" scaled="0"/>
+        </a:gradFill>
+      </a:fillStyleLst>
+      <a:lnStyleLst>
+        <a:ln w="12700" cap="flat" cmpd="sng" algn="ctr">
+          <a:solidFill>
+            <a:schemeClr val="phClr"/>
+          </a:solidFill>
+          <a:prstDash val="solid"/>
+          <a:miter lim="800000"/>
+        </a:ln>
+        <a:ln w="19050" cap="flat" cmpd="sng" algn="ctr">
+          <a:solidFill>
+            <a:schemeClr val="phClr"/>
+          </a:solidFill>
+          <a:prstDash val="solid"/>
+          <a:miter lim="800000"/>
+        </a:ln>
+        <a:ln w="25400" cap="flat" cmpd="sng" algn="ctr">
+          <a:solidFill>
+            <a:schemeClr val="phClr"/>
+          </a:solidFill>
+          <a:prstDash val="solid"/>
+          <a:miter lim="800000"/>
+        </a:ln>
+      </a:lnStyleLst>
+      <a:effectStyleLst>
+        <a:effectStyle>
+          <a:effectLst/>
+        </a:effectStyle>
+        <a:effectStyle>
+          <a:effectLst/>
+        </a:effectStyle>
+        <a:effectStyle>
+          <a:effectLst>
+            <a:outerShdw blurRad="57150" dist="19050" dir="5400000" algn="ctr" rotWithShape="0">
+              <a:srgbClr val="000000">
+                <a:alpha val="63000"/>
+              </a:srgbClr>
+            </a:outerShdw>
+          </a:effectLst>
+        </a:effectStyle>
+      </a:effectStyleLst>
+      <a:bgFillStyleLst>
+        <a:solidFill>
+          <a:schemeClr val="phClr"/>
+        </a:solidFill>
+        <a:solidFill>
+          <a:schemeClr val="phClr">
+            <a:tint val="95000"/>
+            <a:satMod val="170000"/>
+          </a:schemeClr>
+        </a:solidFill>
+        <a:gradFill rotWithShape="1">
+          <a:gsLst>
+            <a:gs pos="0">
+              <a:schemeClr val="phClr">
+                <a:tint val="93000"/>
+                <a:satMod val="150000"/>
+                <a:shade val="98000"/>
+                <a:lumMod val="102000"/>
+              </a:schemeClr>
+            </a:gs>
+            <a:gs pos="50000">
+              <a:schemeClr val="phClr">
+                <a:tint val="98000"/>
+                <a:satMod val="130000"/>
+                <a:shade val="90000"/>
+                <a:lumMod val="103000"/>
+              </a:schemeClr>
+            </a:gs>
+            <a:gs pos="100000">
+              <a:schemeClr val="phClr">
+                <a:shade val="63000"/>
+                <a:satMod val="120000"/>
+              </a:schemeClr>
+            </a:gs>
+          </a:gsLst>
+          <a:lin ang="5400000" scaled="0"/>
+        </a:gradFill>
+      </a:bgFillStyleLst>
+    </a:fmtScheme>
+  </a:themeElements>
+  <a:objectDefaults>
+    <a:lnDef>
+      <a:spPr/>
+      <a:bodyPr/>
+      <a:lstStyle/>
+      <a:style>
+        <a:lnRef idx="2">
+          <a:schemeClr val="accent1"/>
+        </a:lnRef>
+        <a:fillRef idx="0">
+          <a:schemeClr val="accent1"/>
+        </a:fillRef>
+        <a:effectRef idx="1">
+          <a:schemeClr val="accent1"/>
+        </a:effectRef>
+        <a:fontRef idx="minor">
+          <a:schemeClr val="tx1"/>
+        </a:fontRef>
+      </a:style>
+    </a:lnDef>
+  </a:objectDefaults>
+  <a:extraClrSchemeLst/>
+  <a:extLst>
+    <a:ext uri="{05A4C25C-085E-4340-85A3-A5531E510DB2}">
+      <thm15:themeFamily xmlns:thm15="http://schemas.microsoft.com/office/thememl/2012/main" name="Office Theme" id="{2E142A2C-CD16-42D6-873A-C26D2A0506FA}" vid="{1BDDFF52-6CD6-40A5-AB3C-68EB2F1E4D0A}"/>
+    </a:ext>
+  </a:extLst>
+</a:theme>
 </file>